--- a/NotMatters_Presentation.pptx
+++ b/NotMatters_Presentation.pptx
@@ -23,10 +23,9 @@
     <p:sldId id="271" r:id="rId17"/>
     <p:sldId id="272" r:id="rId18"/>
     <p:sldId id="273" r:id="rId19"/>
-    <p:sldId id="274" r:id="rId20"/>
   </p:sldIdLst>
   <p:notesMasterIdLst>
-    <p:notesMasterId r:id="rId21"/>
+    <p:notesMasterId r:id="rId20"/>
   </p:notesMasterIdLst>
   <p:sldSz cx="9144000" cy="5143500"/>
   <p:notesSz cx="5143500" cy="9144000"/>
@@ -1354,94 +1353,6 @@
 </p:notes>
 </file>
 
-<file path=ppt/notesSlides/notesSlide19.xml><?xml version="1.0" encoding="utf-8"?>
-<p:notes xmlns:a="http://schemas.openxmlformats.org/drawingml/2006/main" xmlns:r="http://schemas.openxmlformats.org/officeDocument/2006/relationships" xmlns:p="http://schemas.openxmlformats.org/presentationml/2006/main">
-  <p:cSld>
-    <p:spTree>
-      <p:nvGrpSpPr>
-        <p:cNvPr id="1" name=""/>
-        <p:cNvGrpSpPr/>
-        <p:nvPr/>
-      </p:nvGrpSpPr>
-      <p:grpSpPr>
-        <a:xfrm>
-          <a:off x="0" y="0"/>
-          <a:ext cx="0" cy="0"/>
-          <a:chOff x="0" y="0"/>
-          <a:chExt cx="0" cy="0"/>
-        </a:xfrm>
-      </p:grpSpPr>
-      <p:sp>
-        <p:nvSpPr>
-          <p:cNvPr id="2" name="Slide Image Placeholder 1"/>
-          <p:cNvSpPr>
-            <a:spLocks noGrp="1" noRot="1" noChangeAspect="1"/>
-          </p:cNvSpPr>
-          <p:nvPr>
-            <p:ph type="sldImg"/>
-          </p:nvPr>
-        </p:nvSpPr>
-        <p:spPr/>
-      </p:sp>
-      <p:sp>
-        <p:nvSpPr>
-          <p:cNvPr id="3" name="Notes Placeholder 2"/>
-          <p:cNvSpPr>
-            <a:spLocks noGrp="1"/>
-          </p:cNvSpPr>
-          <p:nvPr>
-            <p:ph type="body" idx="1"/>
-          </p:nvPr>
-        </p:nvSpPr>
-        <p:spPr/>
-        <p:txBody>
-          <a:bodyPr/>
-          <a:lstStyle/>
-          <a:p>
-            <a:r>
-              <a:rPr lang="en-US" dirty="0"/>
-              <a:t/>
-            </a:r>
-            <a:endParaRPr lang="en-US" dirty="0"/>
-          </a:p>
-        </p:txBody>
-      </p:sp>
-      <p:sp>
-        <p:nvSpPr>
-          <p:cNvPr id="4" name="Slide Number Placeholder 3"/>
-          <p:cNvSpPr>
-            <a:spLocks noGrp="1"/>
-          </p:cNvSpPr>
-          <p:nvPr>
-            <p:ph type="sldNum" sz="quarter" idx="10"/>
-          </p:nvPr>
-        </p:nvSpPr>
-        <p:spPr/>
-        <p:txBody>
-          <a:bodyPr/>
-          <a:lstStyle/>
-          <a:p>
-            <a:fld id="{F7021451-1387-4CA6-816F-3879F97B5CBC}" type="slidenum">
-              <a:rPr lang="en-US"/>
-              <a:t>19</a:t>
-            </a:fld>
-            <a:endParaRPr lang="en-US"/>
-          </a:p>
-        </p:txBody>
-      </p:sp>
-    </p:spTree>
-    <p:extLst>
-      <p:ext uri="{BB962C8B-B14F-4D97-AF65-F5344CB8AC3E}">
-        <p14:creationId xmlns:p14="http://schemas.microsoft.com/office/powerpoint/2010/main" val="1024086991"/>
-      </p:ext>
-    </p:extLst>
-  </p:cSld>
-  <p:clrMapOvr>
-    <a:masterClrMapping/>
-  </p:clrMapOvr>
-</p:notes>
-</file>
-
 <file path=ppt/notesSlides/notesSlide2.xml><?xml version="1.0" encoding="utf-8"?>
 <p:notes xmlns:a="http://schemas.openxmlformats.org/drawingml/2006/main" xmlns:r="http://schemas.openxmlformats.org/officeDocument/2006/relationships" xmlns:p="http://schemas.openxmlformats.org/presentationml/2006/main">
   <p:cSld>
@@ -2154,31 +2065,6 @@
         <a:schemeClr val="bg1"/>
       </p:bgRef>
     </p:bg>
-    <p:spTree>
-      <p:nvGrpSpPr>
-        <p:cNvPr id="1" name=""/>
-        <p:cNvGrpSpPr/>
-        <p:nvPr/>
-      </p:nvGrpSpPr>
-      <p:grpSpPr>
-        <a:xfrm>
-          <a:off x="0" y="0"/>
-          <a:ext cx="0" cy="0"/>
-          <a:chOff x="0" y="0"/>
-          <a:chExt cx="0" cy="0"/>
-        </a:xfrm>
-      </p:grpSpPr>
-    </p:spTree>
-  </p:cSld>
-  <p:clrMapOvr>
-    <a:masterClrMapping/>
-  </p:clrMapOvr>
-</p:sldLayout>
-</file>
-
-<file path=ppt/slideLayouts/slideLayout2.xml><?xml version="1.0" encoding="utf-8"?>
-<p:sldLayout xmlns:a="http://schemas.openxmlformats.org/drawingml/2006/main" xmlns:r="http://schemas.openxmlformats.org/officeDocument/2006/relationships" xmlns:p="http://schemas.openxmlformats.org/presentationml/2006/main" preserve="1">
-  <p:cSld name="[object Object]">
     <p:spTree>
       <p:nvGrpSpPr>
         <p:cNvPr id="1" name=""/>
@@ -2223,7 +2109,6 @@
   <p:clrMap bg1="lt1" tx1="dk1" bg2="lt2" tx2="dk2" accent1="accent1" accent2="accent2" accent3="accent3" accent4="accent4" accent5="accent5" accent6="accent6" hlink="hlink" folHlink="folHlink"/>
   <p:sldLayoutIdLst>
     <p:sldLayoutId id="2147483649" r:id="rId1"/>
-    <p:sldLayoutId id="2147483650" r:id="rId2"/>
   </p:sldLayoutIdLst>
   <p:hf sldNum="0" hdr="0" ftr="0" dt="0"/>
   <p:txStyles>
@@ -2504,8 +2389,8 @@
         </p:nvSpPr>
         <p:spPr>
           <a:xfrm>
-            <a:off x="0" y="1371600"/>
-            <a:ext cx="9144000" cy="2286000"/>
+            <a:off x="457200" y="1371600"/>
+            <a:ext cx="8229600" cy="1371600"/>
           </a:xfrm>
           <a:prstGeom prst="rect">
             <a:avLst/>
@@ -2521,14 +2406,14 @@
               <a:buNone/>
             </a:pPr>
             <a:r>
-              <a:rPr lang="en-US" sz="4800" b="1" dirty="0">
+              <a:rPr lang="en-US" sz="4200" b="1" dirty="0">
                 <a:solidFill>
                   <a:srgbClr val="366092"/>
                 </a:solidFill>
               </a:rPr>
               <a:t>事项提示器（NotMatters）</a:t>
             </a:r>
-            <a:endParaRPr lang="en-US" sz="4800" dirty="0"/>
+            <a:endParaRPr lang="en-US" sz="4200" dirty="0"/>
           </a:p>
         </p:txBody>
       </p:sp>
@@ -2540,8 +2425,8 @@
         </p:nvSpPr>
         <p:spPr>
           <a:xfrm>
-            <a:off x="0" y="4114800"/>
-            <a:ext cx="9144000" cy="1371600"/>
+            <a:off x="457200" y="2926080"/>
+            <a:ext cx="8229600" cy="914400"/>
           </a:xfrm>
           <a:prstGeom prst="rect">
             <a:avLst/>
@@ -2576,8 +2461,8 @@
         </p:nvSpPr>
         <p:spPr>
           <a:xfrm>
-            <a:off x="0" y="6400800"/>
-            <a:ext cx="9144000" cy="914400"/>
+            <a:off x="457200" y="4389120"/>
+            <a:ext cx="8229600" cy="731520"/>
           </a:xfrm>
           <a:prstGeom prst="rect">
             <a:avLst/>
@@ -2598,21 +2483,7 @@
                   <a:srgbClr val="888888"/>
                 </a:solidFill>
               </a:rPr>
-              <a:t>版本: 1.0.0</a:t>
-            </a:r>
-            <a:endParaRPr lang="en-US" sz="1400" dirty="0"/>
-          </a:p>
-          <a:p>
-            <a:pPr algn="ctr" indent="0" marL="0">
-              <a:buNone/>
-            </a:pPr>
-            <a:r>
-              <a:rPr lang="en-US" sz="1400" dirty="0">
-                <a:solidFill>
-                  <a:srgbClr val="888888"/>
-                </a:solidFill>
-              </a:rPr>
-              <a:t>最后更新: 2026-04-13</a:t>
+              <a:t>版本: 1.0.0 | 最后更新: 2026-04-13</a:t>
             </a:r>
             <a:endParaRPr lang="en-US" sz="1400" dirty="0"/>
           </a:p>
@@ -2651,8 +2522,8 @@
         </p:nvSpPr>
         <p:spPr>
           <a:xfrm>
-            <a:off x="0" y="457200"/>
-            <a:ext cx="9144000" cy="914400"/>
+            <a:off x="457200" y="457200"/>
+            <a:ext cx="8229600" cy="914400"/>
           </a:xfrm>
           <a:prstGeom prst="rect">
             <a:avLst/>
@@ -2668,14 +2539,14 @@
               <a:buNone/>
             </a:pPr>
             <a:r>
-              <a:rPr lang="en-US" sz="3200" b="1" dirty="0">
+              <a:rPr lang="en-US" sz="2800" b="1" dirty="0">
                 <a:solidFill>
                   <a:srgbClr val="366092"/>
                 </a:solidFill>
               </a:rPr>
               <a:t>数据库设计</a:t>
             </a:r>
-            <a:endParaRPr lang="en-US" sz="3200" dirty="0"/>
+            <a:endParaRPr lang="en-US" sz="2800" dirty="0"/>
           </a:p>
         </p:txBody>
       </p:sp>
@@ -2687,7 +2558,7 @@
         </p:nvSpPr>
         <p:spPr>
           <a:xfrm>
-            <a:off x="914400" y="1645920"/>
+            <a:off x="457200" y="1645920"/>
             <a:ext cx="3657600" cy="548640"/>
           </a:xfrm>
           <a:prstGeom prst="rect">
@@ -2704,14 +2575,14 @@
               <a:buNone/>
             </a:pPr>
             <a:r>
-              <a:rPr lang="en-US" sz="1800" b="1" dirty="0">
+              <a:rPr lang="en-US" sz="1600" b="1" dirty="0">
                 <a:solidFill>
                   <a:srgbClr val="548DD4"/>
                 </a:solidFill>
               </a:rPr>
               <a:t>1. User（Django内置）</a:t>
             </a:r>
-            <a:endParaRPr lang="en-US" sz="1800" dirty="0"/>
+            <a:endParaRPr lang="en-US" sz="1600" dirty="0"/>
           </a:p>
         </p:txBody>
       </p:sp>
@@ -2723,7 +2594,7 @@
         </p:nvSpPr>
         <p:spPr>
           <a:xfrm>
-            <a:off x="1371600" y="2194560"/>
+            <a:off x="914400" y="2194560"/>
             <a:ext cx="3657600" cy="2286000"/>
           </a:xfrm>
           <a:prstGeom prst="rect">
@@ -2740,7 +2611,7 @@
               <a:buNone/>
             </a:pPr>
             <a:r>
-              <a:rPr lang="en-US" sz="1400" dirty="0">
+              <a:rPr lang="en-US" sz="1300" dirty="0">
                 <a:solidFill>
                   <a:srgbClr val="000000"/>
                 </a:solidFill>
@@ -2752,7 +2623,7 @@
               <a:buNone/>
             </a:pPr>
             <a:r>
-              <a:rPr lang="en-US" sz="1400" dirty="0">
+              <a:rPr lang="en-US" sz="1300" dirty="0">
                 <a:solidFill>
                   <a:srgbClr val="000000"/>
                 </a:solidFill>
@@ -2764,7 +2635,7 @@
               <a:buNone/>
             </a:pPr>
             <a:r>
-              <a:rPr lang="en-US" sz="1400" dirty="0">
+              <a:rPr lang="en-US" sz="1300" dirty="0">
                 <a:solidFill>
                   <a:srgbClr val="000000"/>
                 </a:solidFill>
@@ -2776,7 +2647,7 @@
               <a:buNone/>
             </a:pPr>
             <a:r>
-              <a:rPr lang="en-US" sz="1400" dirty="0">
+              <a:rPr lang="en-US" sz="1300" dirty="0">
                 <a:solidFill>
                   <a:srgbClr val="000000"/>
                 </a:solidFill>
@@ -2788,7 +2659,7 @@
               <a:buNone/>
             </a:pPr>
             <a:r>
-              <a:rPr lang="en-US" sz="1400" dirty="0">
+              <a:rPr lang="en-US" sz="1300" dirty="0">
                 <a:solidFill>
                   <a:srgbClr val="000000"/>
                 </a:solidFill>
@@ -2800,7 +2671,7 @@
               <a:buNone/>
             </a:pPr>
             <a:r>
-              <a:rPr lang="en-US" sz="1400" dirty="0">
+              <a:rPr lang="en-US" sz="1300" dirty="0">
                 <a:solidFill>
                   <a:srgbClr val="000000"/>
                 </a:solidFill>
@@ -2808,7 +2679,7 @@
               <a:t>• last_name: 姓
 </a:t>
             </a:r>
-            <a:endParaRPr lang="en-US" sz="1400" dirty="0"/>
+            <a:endParaRPr lang="en-US" sz="1300" dirty="0"/>
           </a:p>
         </p:txBody>
       </p:sp>
@@ -2820,7 +2691,7 @@
         </p:nvSpPr>
         <p:spPr>
           <a:xfrm>
-            <a:off x="5486400" y="1645920"/>
+            <a:off x="5029200" y="1645920"/>
             <a:ext cx="3657600" cy="548640"/>
           </a:xfrm>
           <a:prstGeom prst="rect">
@@ -2837,14 +2708,14 @@
               <a:buNone/>
             </a:pPr>
             <a:r>
-              <a:rPr lang="en-US" sz="1800" b="1" dirty="0">
+              <a:rPr lang="en-US" sz="1600" b="1" dirty="0">
                 <a:solidFill>
                   <a:srgbClr val="548DD4"/>
                 </a:solidFill>
               </a:rPr>
               <a:t>2. UserProfile</a:t>
             </a:r>
-            <a:endParaRPr lang="en-US" sz="1800" dirty="0"/>
+            <a:endParaRPr lang="en-US" sz="1600" dirty="0"/>
           </a:p>
         </p:txBody>
       </p:sp>
@@ -2856,7 +2727,7 @@
         </p:nvSpPr>
         <p:spPr>
           <a:xfrm>
-            <a:off x="5943600" y="2194560"/>
+            <a:off x="5486400" y="2194560"/>
             <a:ext cx="3657600" cy="1828800"/>
           </a:xfrm>
           <a:prstGeom prst="rect">
@@ -2873,7 +2744,7 @@
               <a:buNone/>
             </a:pPr>
             <a:r>
-              <a:rPr lang="en-US" sz="1400" dirty="0">
+              <a:rPr lang="en-US" sz="1300" dirty="0">
                 <a:solidFill>
                   <a:srgbClr val="000000"/>
                 </a:solidFill>
@@ -2885,7 +2756,7 @@
               <a:buNone/>
             </a:pPr>
             <a:r>
-              <a:rPr lang="en-US" sz="1400" dirty="0">
+              <a:rPr lang="en-US" sz="1300" dirty="0">
                 <a:solidFill>
                   <a:srgbClr val="000000"/>
                 </a:solidFill>
@@ -2897,7 +2768,7 @@
               <a:buNone/>
             </a:pPr>
             <a:r>
-              <a:rPr lang="en-US" sz="1400" dirty="0">
+              <a:rPr lang="en-US" sz="1300" dirty="0">
                 <a:solidFill>
                   <a:srgbClr val="000000"/>
                 </a:solidFill>
@@ -2909,7 +2780,7 @@
               <a:buNone/>
             </a:pPr>
             <a:r>
-              <a:rPr lang="en-US" sz="1400" dirty="0">
+              <a:rPr lang="en-US" sz="1300" dirty="0">
                 <a:solidFill>
                   <a:srgbClr val="000000"/>
                 </a:solidFill>
@@ -2917,7 +2788,7 @@
               <a:t>• reminder_sound: 提醒音效
 </a:t>
             </a:r>
-            <a:endParaRPr lang="en-US" sz="1400" dirty="0"/>
+            <a:endParaRPr lang="en-US" sz="1300" dirty="0"/>
           </a:p>
         </p:txBody>
       </p:sp>
@@ -2929,7 +2800,7 @@
         </p:nvSpPr>
         <p:spPr>
           <a:xfrm>
-            <a:off x="914400" y="4572000"/>
+            <a:off x="457200" y="4389120"/>
             <a:ext cx="8229600" cy="548640"/>
           </a:xfrm>
           <a:prstGeom prst="rect">
@@ -2946,14 +2817,14 @@
               <a:buNone/>
             </a:pPr>
             <a:r>
-              <a:rPr lang="en-US" sz="1800" b="1" dirty="0">
+              <a:rPr lang="en-US" sz="1600" b="1" dirty="0">
                 <a:solidFill>
                   <a:srgbClr val="548DD4"/>
                 </a:solidFill>
               </a:rPr>
               <a:t>3. Task</a:t>
             </a:r>
-            <a:endParaRPr lang="en-US" sz="1800" dirty="0"/>
+            <a:endParaRPr lang="en-US" sz="1600" dirty="0"/>
           </a:p>
         </p:txBody>
       </p:sp>
@@ -2965,152 +2836,80 @@
         </p:nvSpPr>
         <p:spPr>
           <a:xfrm>
-            <a:off x="1371600" y="5120640"/>
-            <a:ext cx="8229600" cy="1828800"/>
-          </a:xfrm>
-          <a:prstGeom prst="rect">
-            <a:avLst/>
-          </a:prstGeom>
-          <a:noFill/>
-          <a:ln/>
-        </p:spPr>
-        <p:txBody>
-          <a:bodyPr wrap="square" rtlCol="0" anchor="ctr"/>
-          <a:lstStyle/>
-          <a:p>
-            <a:pPr indent="0" marL="0">
-              <a:buNone/>
-            </a:pPr>
-            <a:r>
-              <a:rPr lang="en-US" sz="1400" dirty="0">
-                <a:solidFill>
-                  <a:srgbClr val="000000"/>
-                </a:solidFill>
-              </a:rPr>
-              <a:t>• id: 主键
-</a:t>
-            </a:r>
-            <a:pPr indent="0" marL="0">
-              <a:buNone/>
-            </a:pPr>
-            <a:r>
-              <a:rPr lang="en-US" sz="1400" dirty="0">
-                <a:solidFill>
-                  <a:srgbClr val="000000"/>
-                </a:solidFill>
-              </a:rPr>
-              <a:t>• user: 外键（User）
-</a:t>
-            </a:r>
-            <a:pPr indent="0" marL="0">
-              <a:buNone/>
-            </a:pPr>
-            <a:r>
-              <a:rPr lang="en-US" sz="1400" dirty="0">
-                <a:solidFill>
-                  <a:srgbClr val="000000"/>
-                </a:solidFill>
-              </a:rPr>
-              <a:t>• title: 标题
-</a:t>
-            </a:r>
-            <a:pPr indent="0" marL="0">
-              <a:buNone/>
-            </a:pPr>
-            <a:r>
-              <a:rPr lang="en-US" sz="1400" dirty="0">
-                <a:solidFill>
-                  <a:srgbClr val="000000"/>
-                </a:solidFill>
-              </a:rPr>
-              <a:t>• description: 描述
-</a:t>
-            </a:r>
-            <a:pPr indent="0" marL="0">
-              <a:buNone/>
-            </a:pPr>
-            <a:r>
-              <a:rPr lang="en-US" sz="1400" dirty="0">
-                <a:solidFill>
-                  <a:srgbClr val="000000"/>
-                </a:solidFill>
-              </a:rPr>
-              <a:t>• priority: 优先级
-</a:t>
-            </a:r>
-            <a:pPr indent="0" marL="0">
-              <a:buNone/>
-            </a:pPr>
-            <a:r>
-              <a:rPr lang="en-US" sz="1400" dirty="0">
-                <a:solidFill>
-                  <a:srgbClr val="000000"/>
-                </a:solidFill>
-              </a:rPr>
-              <a:t>• due_date: 截止时间
-</a:t>
-            </a:r>
-            <a:pPr indent="0" marL="0">
-              <a:buNone/>
-            </a:pPr>
-            <a:r>
-              <a:rPr lang="en-US" sz="1400" dirty="0">
-                <a:solidFill>
-                  <a:srgbClr val="000000"/>
-                </a:solidFill>
-              </a:rPr>
-              <a:t>• status: 状态
-</a:t>
-            </a:r>
-            <a:pPr indent="0" marL="0">
-              <a:buNone/>
-            </a:pPr>
-            <a:r>
-              <a:rPr lang="en-US" sz="1400" dirty="0">
-                <a:solidFill>
-                  <a:srgbClr val="000000"/>
-                </a:solidFill>
-              </a:rPr>
-              <a:t>• reminder_time: 提醒时间
-</a:t>
-            </a:r>
-            <a:pPr indent="0" marL="0">
-              <a:buNone/>
-            </a:pPr>
-            <a:r>
-              <a:rPr lang="en-US" sz="1400" dirty="0">
-                <a:solidFill>
-                  <a:srgbClr val="000000"/>
-                </a:solidFill>
-              </a:rPr>
-              <a:t>• reminder_period: 提醒周期
-</a:t>
-            </a:r>
-            <a:pPr indent="0" marL="0">
-              <a:buNone/>
-            </a:pPr>
-            <a:r>
-              <a:rPr lang="en-US" sz="1400" dirty="0">
-                <a:solidFill>
-                  <a:srgbClr val="000000"/>
-                </a:solidFill>
-              </a:rPr>
-              <a:t>• tags: 标签
-</a:t>
-            </a:r>
-            <a:pPr indent="0" marL="0">
-              <a:buNone/>
-            </a:pPr>
-            <a:r>
-              <a:rPr lang="en-US" sz="1400" dirty="0">
-                <a:solidFill>
-                  <a:srgbClr val="000000"/>
-                </a:solidFill>
-              </a:rPr>
-              <a:t>• progress_nodes: 进度节点
-</a:t>
-            </a:r>
-            <a:endParaRPr lang="en-US" sz="1400" dirty="0"/>
+            <a:off x="914400" y="4937760"/>
+            <a:ext cx="8229600" cy="1645920"/>
+          </a:xfrm>
+          <a:prstGeom prst="rect">
+            <a:avLst/>
+          </a:prstGeom>
+          <a:noFill/>
+          <a:ln/>
+        </p:spPr>
+        <p:txBody>
+          <a:bodyPr wrap="square" rtlCol="0" anchor="ctr"/>
+          <a:lstStyle/>
+          <a:p>
+            <a:pPr indent="0" marL="0">
+              <a:buNone/>
+            </a:pPr>
+            <a:r>
+              <a:rPr lang="en-US" sz="1300" dirty="0">
+                <a:solidFill>
+                  <a:srgbClr val="000000"/>
+                </a:solidFill>
+              </a:rPr>
+              <a:t>• id: 主键 | user: 外键（User）
+</a:t>
+            </a:r>
+            <a:pPr indent="0" marL="0">
+              <a:buNone/>
+            </a:pPr>
+            <a:r>
+              <a:rPr lang="en-US" sz="1300" dirty="0">
+                <a:solidFill>
+                  <a:srgbClr val="000000"/>
+                </a:solidFill>
+              </a:rPr>
+              <a:t>• title: 标题 | description: 描述
+</a:t>
+            </a:r>
+            <a:pPr indent="0" marL="0">
+              <a:buNone/>
+            </a:pPr>
+            <a:r>
+              <a:rPr lang="en-US" sz="1300" dirty="0">
+                <a:solidFill>
+                  <a:srgbClr val="000000"/>
+                </a:solidFill>
+              </a:rPr>
+              <a:t>• priority: 优先级 | due_date: 截止时间
+</a:t>
+            </a:r>
+            <a:pPr indent="0" marL="0">
+              <a:buNone/>
+            </a:pPr>
+            <a:r>
+              <a:rPr lang="en-US" sz="1300" dirty="0">
+                <a:solidFill>
+                  <a:srgbClr val="000000"/>
+                </a:solidFill>
+              </a:rPr>
+              <a:t>• status: 状态 | reminder_time: 提醒时间
+</a:t>
+            </a:r>
+            <a:pPr indent="0" marL="0">
+              <a:buNone/>
+            </a:pPr>
+            <a:r>
+              <a:rPr lang="en-US" sz="1300" dirty="0">
+                <a:solidFill>
+                  <a:srgbClr val="000000"/>
+                </a:solidFill>
+              </a:rPr>
+              <a:t>• reminder_period: 提醒周期 | tags: 标签
+</a:t>
+            </a:r>
+            <a:endParaRPr lang="en-US" sz="1300" dirty="0"/>
           </a:p>
         </p:txBody>
       </p:sp>
@@ -3147,8 +2946,8 @@
         </p:nvSpPr>
         <p:spPr>
           <a:xfrm>
-            <a:off x="0" y="457200"/>
-            <a:ext cx="9144000" cy="914400"/>
+            <a:off x="457200" y="457200"/>
+            <a:ext cx="8229600" cy="914400"/>
           </a:xfrm>
           <a:prstGeom prst="rect">
             <a:avLst/>
@@ -3164,14 +2963,14 @@
               <a:buNone/>
             </a:pPr>
             <a:r>
-              <a:rPr lang="en-US" sz="3200" b="1" dirty="0">
+              <a:rPr lang="en-US" sz="2800" b="1" dirty="0">
                 <a:solidFill>
                   <a:srgbClr val="366092"/>
                 </a:solidFill>
               </a:rPr>
               <a:t>安装部署</a:t>
             </a:r>
-            <a:endParaRPr lang="en-US" sz="3200" dirty="0"/>
+            <a:endParaRPr lang="en-US" sz="2800" dirty="0"/>
           </a:p>
         </p:txBody>
       </p:sp>
@@ -3183,31 +2982,31 @@
         </p:nvSpPr>
         <p:spPr>
           <a:xfrm>
-            <a:off x="914400" y="1645920"/>
-            <a:ext cx="3657600" cy="548640"/>
-          </a:xfrm>
-          <a:prstGeom prst="rect">
-            <a:avLst/>
-          </a:prstGeom>
-          <a:noFill/>
-          <a:ln/>
-        </p:spPr>
-        <p:txBody>
-          <a:bodyPr wrap="square" rtlCol="0" anchor="ctr"/>
-          <a:lstStyle/>
-          <a:p>
-            <a:pPr indent="0" marL="0">
-              <a:buNone/>
-            </a:pPr>
-            <a:r>
-              <a:rPr lang="en-US" sz="2000" b="1" dirty="0">
+            <a:off x="457200" y="1645920"/>
+            <a:ext cx="8229600" cy="548640"/>
+          </a:xfrm>
+          <a:prstGeom prst="rect">
+            <a:avLst/>
+          </a:prstGeom>
+          <a:noFill/>
+          <a:ln/>
+        </p:spPr>
+        <p:txBody>
+          <a:bodyPr wrap="square" rtlCol="0" anchor="ctr"/>
+          <a:lstStyle/>
+          <a:p>
+            <a:pPr indent="0" marL="0">
+              <a:buNone/>
+            </a:pPr>
+            <a:r>
+              <a:rPr lang="en-US" sz="1800" b="1" dirty="0">
                 <a:solidFill>
                   <a:srgbClr val="000000"/>
                 </a:solidFill>
               </a:rPr>
               <a:t>1. 环境要求</a:t>
             </a:r>
-            <a:endParaRPr lang="en-US" sz="2000" dirty="0"/>
+            <a:endParaRPr lang="en-US" sz="1800" dirty="0"/>
           </a:p>
         </p:txBody>
       </p:sp>
@@ -3219,8 +3018,8 @@
         </p:nvSpPr>
         <p:spPr>
           <a:xfrm>
-            <a:off x="1371600" y="2194560"/>
-            <a:ext cx="3657600" cy="1371600"/>
+            <a:off x="914400" y="2194560"/>
+            <a:ext cx="8229600" cy="1371600"/>
           </a:xfrm>
           <a:prstGeom prst="rect">
             <a:avLst/>
@@ -3280,7 +3079,7 @@
         </p:nvSpPr>
         <p:spPr>
           <a:xfrm>
-            <a:off x="914400" y="3657600"/>
+            <a:off x="457200" y="3749040"/>
             <a:ext cx="8229600" cy="548640"/>
           </a:xfrm>
           <a:prstGeom prst="rect">
@@ -3297,14 +3096,14 @@
               <a:buNone/>
             </a:pPr>
             <a:r>
-              <a:rPr lang="en-US" sz="2000" b="1" dirty="0">
+              <a:rPr lang="en-US" sz="1800" b="1" dirty="0">
                 <a:solidFill>
                   <a:srgbClr val="000000"/>
                 </a:solidFill>
               </a:rPr>
               <a:t>2. 安装步骤</a:t>
             </a:r>
-            <a:endParaRPr lang="en-US" sz="2000" dirty="0"/>
+            <a:endParaRPr lang="en-US" sz="1800" dirty="0"/>
           </a:p>
         </p:txBody>
       </p:sp>
@@ -3316,24 +3115,24 @@
         </p:nvSpPr>
         <p:spPr>
           <a:xfrm>
-            <a:off x="1371600" y="4206240"/>
-            <a:ext cx="8229600" cy="2743200"/>
-          </a:xfrm>
-          <a:prstGeom prst="rect">
-            <a:avLst/>
-          </a:prstGeom>
-          <a:noFill/>
-          <a:ln/>
-        </p:spPr>
-        <p:txBody>
-          <a:bodyPr wrap="square" rtlCol="0" anchor="ctr"/>
-          <a:lstStyle/>
-          <a:p>
-            <a:pPr indent="0" marL="0">
-              <a:buNone/>
-            </a:pPr>
-            <a:r>
-              <a:rPr lang="en-US" sz="1600" dirty="0">
+            <a:off x="914400" y="4297680"/>
+            <a:ext cx="8229600" cy="2286000"/>
+          </a:xfrm>
+          <a:prstGeom prst="rect">
+            <a:avLst/>
+          </a:prstGeom>
+          <a:noFill/>
+          <a:ln/>
+        </p:spPr>
+        <p:txBody>
+          <a:bodyPr wrap="square" rtlCol="0" anchor="ctr"/>
+          <a:lstStyle/>
+          <a:p>
+            <a:pPr indent="0" marL="0">
+              <a:buNone/>
+            </a:pPr>
+            <a:r>
+              <a:rPr lang="en-US" sz="1400" dirty="0">
                 <a:solidFill>
                   <a:srgbClr val="000000"/>
                 </a:solidFill>
@@ -3345,7 +3144,7 @@
               <a:buNone/>
             </a:pPr>
             <a:r>
-              <a:rPr lang="en-US" sz="1600" dirty="0">
+              <a:rPr lang="en-US" sz="1400" dirty="0">
                 <a:solidFill>
                   <a:srgbClr val="000000"/>
                 </a:solidFill>
@@ -3357,7 +3156,7 @@
               <a:buNone/>
             </a:pPr>
             <a:r>
-              <a:rPr lang="en-US" sz="1600" dirty="0">
+              <a:rPr lang="en-US" sz="1400" dirty="0">
                 <a:solidFill>
                   <a:srgbClr val="000000"/>
                 </a:solidFill>
@@ -3369,7 +3168,7 @@
               <a:buNone/>
             </a:pPr>
             <a:r>
-              <a:rPr lang="en-US" sz="1600" dirty="0">
+              <a:rPr lang="en-US" sz="1400" dirty="0">
                 <a:solidFill>
                   <a:srgbClr val="000000"/>
                 </a:solidFill>
@@ -3381,7 +3180,7 @@
               <a:buNone/>
             </a:pPr>
             <a:r>
-              <a:rPr lang="en-US" sz="1600" dirty="0">
+              <a:rPr lang="en-US" sz="1400" dirty="0">
                 <a:solidFill>
                   <a:srgbClr val="000000"/>
                 </a:solidFill>
@@ -3393,7 +3192,7 @@
               <a:buNone/>
             </a:pPr>
             <a:r>
-              <a:rPr lang="en-US" sz="1600" dirty="0">
+              <a:rPr lang="en-US" sz="1400" dirty="0">
                 <a:solidFill>
                   <a:srgbClr val="000000"/>
                 </a:solidFill>
@@ -3401,7 +3200,7 @@
               <a:t>• 创建超级用户：python manage.py createsuperuser
 </a:t>
             </a:r>
-            <a:endParaRPr lang="en-US" sz="1600" dirty="0"/>
+            <a:endParaRPr lang="en-US" sz="1400" dirty="0"/>
           </a:p>
         </p:txBody>
       </p:sp>
@@ -3438,8 +3237,8 @@
         </p:nvSpPr>
         <p:spPr>
           <a:xfrm>
-            <a:off x="0" y="457200"/>
-            <a:ext cx="9144000" cy="914400"/>
+            <a:off x="457200" y="457200"/>
+            <a:ext cx="8229600" cy="914400"/>
           </a:xfrm>
           <a:prstGeom prst="rect">
             <a:avLst/>
@@ -3455,14 +3254,14 @@
               <a:buNone/>
             </a:pPr>
             <a:r>
-              <a:rPr lang="en-US" sz="3200" b="1" dirty="0">
+              <a:rPr lang="en-US" sz="2800" b="1" dirty="0">
                 <a:solidFill>
                   <a:srgbClr val="366092"/>
                 </a:solidFill>
               </a:rPr>
               <a:t>运行项目</a:t>
             </a:r>
-            <a:endParaRPr lang="en-US" sz="3200" dirty="0"/>
+            <a:endParaRPr lang="en-US" sz="2800" dirty="0"/>
           </a:p>
         </p:txBody>
       </p:sp>
@@ -3474,7 +3273,7 @@
         </p:nvSpPr>
         <p:spPr>
           <a:xfrm>
-            <a:off x="914400" y="1828800"/>
+            <a:off x="457200" y="1645920"/>
             <a:ext cx="8229600" cy="548640"/>
           </a:xfrm>
           <a:prstGeom prst="rect">
@@ -3491,14 +3290,14 @@
               <a:buNone/>
             </a:pPr>
             <a:r>
-              <a:rPr lang="en-US" sz="2000" b="1" dirty="0">
+              <a:rPr lang="en-US" sz="1800" b="1" dirty="0">
                 <a:solidFill>
                   <a:srgbClr val="000000"/>
                 </a:solidFill>
               </a:rPr>
               <a:t>1. 开发模式（支持WebSocket）</a:t>
             </a:r>
-            <a:endParaRPr lang="en-US" sz="2000" dirty="0"/>
+            <a:endParaRPr lang="en-US" sz="1800" dirty="0"/>
           </a:p>
         </p:txBody>
       </p:sp>
@@ -3510,7 +3309,7 @@
         </p:nvSpPr>
         <p:spPr>
           <a:xfrm>
-            <a:off x="1371600" y="2377440"/>
+            <a:off x="914400" y="2194560"/>
             <a:ext cx="8229600" cy="731520"/>
           </a:xfrm>
           <a:prstGeom prst="rect">
@@ -3527,14 +3326,14 @@
               <a:buNone/>
             </a:pPr>
             <a:r>
-              <a:rPr lang="en-US" sz="1600" dirty="0">
+              <a:rPr lang="en-US" sz="1400" dirty="0">
                 <a:solidFill>
                   <a:srgbClr val="0066CC"/>
                 </a:solidFill>
               </a:rPr>
               <a:t>python -m daphne -b 127.0.0.1 -p 8000 NotMatters.asgi:application</a:t>
             </a:r>
-            <a:endParaRPr lang="en-US" sz="1600" dirty="0"/>
+            <a:endParaRPr lang="en-US" sz="1400" dirty="0"/>
           </a:p>
         </p:txBody>
       </p:sp>
@@ -3546,7 +3345,7 @@
         </p:nvSpPr>
         <p:spPr>
           <a:xfrm>
-            <a:off x="914400" y="3657600"/>
+            <a:off x="457200" y="3200400"/>
             <a:ext cx="8229600" cy="548640"/>
           </a:xfrm>
           <a:prstGeom prst="rect">
@@ -3563,14 +3362,14 @@
               <a:buNone/>
             </a:pPr>
             <a:r>
-              <a:rPr lang="en-US" sz="2000" b="1" dirty="0">
+              <a:rPr lang="en-US" sz="1800" b="1" dirty="0">
                 <a:solidFill>
                   <a:srgbClr val="000000"/>
                 </a:solidFill>
               </a:rPr>
               <a:t>2. 开发模式（不支持WebSocket）</a:t>
             </a:r>
-            <a:endParaRPr lang="en-US" sz="2000" dirty="0"/>
+            <a:endParaRPr lang="en-US" sz="1800" dirty="0"/>
           </a:p>
         </p:txBody>
       </p:sp>
@@ -3582,7 +3381,7 @@
         </p:nvSpPr>
         <p:spPr>
           <a:xfrm>
-            <a:off x="1371600" y="4206240"/>
+            <a:off x="914400" y="3749040"/>
             <a:ext cx="8229600" cy="731520"/>
           </a:xfrm>
           <a:prstGeom prst="rect">
@@ -3599,14 +3398,14 @@
               <a:buNone/>
             </a:pPr>
             <a:r>
-              <a:rPr lang="en-US" sz="1600" dirty="0">
+              <a:rPr lang="en-US" sz="1400" dirty="0">
                 <a:solidFill>
                   <a:srgbClr val="0066CC"/>
                 </a:solidFill>
               </a:rPr>
               <a:t>python manage.py runserver 8000</a:t>
             </a:r>
-            <a:endParaRPr lang="en-US" sz="1600" dirty="0"/>
+            <a:endParaRPr lang="en-US" sz="1400" dirty="0"/>
           </a:p>
         </p:txBody>
       </p:sp>
@@ -3618,7 +3417,7 @@
         </p:nvSpPr>
         <p:spPr>
           <a:xfrm>
-            <a:off x="914400" y="5486400"/>
+            <a:off x="457200" y="4754880"/>
             <a:ext cx="8229600" cy="548640"/>
           </a:xfrm>
           <a:prstGeom prst="rect">
@@ -3635,14 +3434,14 @@
               <a:buNone/>
             </a:pPr>
             <a:r>
-              <a:rPr lang="en-US" sz="2000" b="1" dirty="0">
+              <a:rPr lang="en-US" sz="1800" b="1" dirty="0">
                 <a:solidFill>
                   <a:srgbClr val="000000"/>
                 </a:solidFill>
               </a:rPr>
               <a:t>3. 访问项目</a:t>
             </a:r>
-            <a:endParaRPr lang="en-US" sz="2000" dirty="0"/>
+            <a:endParaRPr lang="en-US" sz="1800" dirty="0"/>
           </a:p>
         </p:txBody>
       </p:sp>
@@ -3654,7 +3453,7 @@
         </p:nvSpPr>
         <p:spPr>
           <a:xfrm>
-            <a:off x="1371600" y="6035040"/>
+            <a:off x="914400" y="5303520"/>
             <a:ext cx="8229600" cy="731520"/>
           </a:xfrm>
           <a:prstGeom prst="rect">
@@ -3671,14 +3470,14 @@
               <a:buNone/>
             </a:pPr>
             <a:r>
-              <a:rPr lang="en-US" sz="1600" dirty="0">
+              <a:rPr lang="en-US" sz="1400" dirty="0">
                 <a:solidFill>
                   <a:srgbClr val="0066CC"/>
                 </a:solidFill>
               </a:rPr>
               <a:t>打开浏览器访问：http://localhost:8000/</a:t>
             </a:r>
-            <a:endParaRPr lang="en-US" sz="1600" dirty="0"/>
+            <a:endParaRPr lang="en-US" sz="1400" dirty="0"/>
           </a:p>
         </p:txBody>
       </p:sp>
@@ -3715,8 +3514,8 @@
         </p:nvSpPr>
         <p:spPr>
           <a:xfrm>
-            <a:off x="0" y="457200"/>
-            <a:ext cx="9144000" cy="914400"/>
+            <a:off x="457200" y="457200"/>
+            <a:ext cx="8229600" cy="914400"/>
           </a:xfrm>
           <a:prstGeom prst="rect">
             <a:avLst/>
@@ -3732,14 +3531,14 @@
               <a:buNone/>
             </a:pPr>
             <a:r>
-              <a:rPr lang="en-US" sz="3200" b="1" dirty="0">
+              <a:rPr lang="en-US" sz="2800" b="1" dirty="0">
                 <a:solidFill>
                   <a:srgbClr val="366092"/>
                 </a:solidFill>
               </a:rPr>
               <a:t>使用指南</a:t>
             </a:r>
-            <a:endParaRPr lang="en-US" sz="3200" dirty="0"/>
+            <a:endParaRPr lang="en-US" sz="2800" dirty="0"/>
           </a:p>
         </p:txBody>
       </p:sp>
@@ -3751,7 +3550,7 @@
         </p:nvSpPr>
         <p:spPr>
           <a:xfrm>
-            <a:off x="914400" y="1645920"/>
+            <a:off x="457200" y="1645920"/>
             <a:ext cx="3657600" cy="548640"/>
           </a:xfrm>
           <a:prstGeom prst="rect">
@@ -3768,14 +3567,14 @@
               <a:buNone/>
             </a:pPr>
             <a:r>
-              <a:rPr lang="en-US" sz="1800" b="1" dirty="0">
+              <a:rPr lang="en-US" sz="1600" b="1" dirty="0">
                 <a:solidFill>
                   <a:srgbClr val="548DD4"/>
                 </a:solidFill>
               </a:rPr>
               <a:t>1. 注册登录</a:t>
             </a:r>
-            <a:endParaRPr lang="en-US" sz="1800" dirty="0"/>
+            <a:endParaRPr lang="en-US" sz="1600" dirty="0"/>
           </a:p>
         </p:txBody>
       </p:sp>
@@ -3787,24 +3586,24 @@
         </p:nvSpPr>
         <p:spPr>
           <a:xfrm>
-            <a:off x="1371600" y="2194560"/>
-            <a:ext cx="3657600" cy="1371600"/>
-          </a:xfrm>
-          <a:prstGeom prst="rect">
-            <a:avLst/>
-          </a:prstGeom>
-          <a:noFill/>
-          <a:ln/>
-        </p:spPr>
-        <p:txBody>
-          <a:bodyPr wrap="square" rtlCol="0" anchor="ctr"/>
-          <a:lstStyle/>
-          <a:p>
-            <a:pPr indent="0" marL="0">
-              <a:buNone/>
-            </a:pPr>
-            <a:r>
-              <a:rPr lang="en-US" sz="1600" dirty="0">
+            <a:off x="914400" y="2194560"/>
+            <a:ext cx="3657600" cy="1645920"/>
+          </a:xfrm>
+          <a:prstGeom prst="rect">
+            <a:avLst/>
+          </a:prstGeom>
+          <a:noFill/>
+          <a:ln/>
+        </p:spPr>
+        <p:txBody>
+          <a:bodyPr wrap="square" rtlCol="0" anchor="ctr"/>
+          <a:lstStyle/>
+          <a:p>
+            <a:pPr indent="0" marL="0">
+              <a:buNone/>
+            </a:pPr>
+            <a:r>
+              <a:rPr lang="en-US" sz="1400" dirty="0">
                 <a:solidFill>
                   <a:srgbClr val="000000"/>
                 </a:solidFill>
@@ -3816,7 +3615,7 @@
               <a:buNone/>
             </a:pPr>
             <a:r>
-              <a:rPr lang="en-US" sz="1600" dirty="0">
+              <a:rPr lang="en-US" sz="1400" dirty="0">
                 <a:solidFill>
                   <a:srgbClr val="000000"/>
                 </a:solidFill>
@@ -3828,7 +3627,7 @@
               <a:buNone/>
             </a:pPr>
             <a:r>
-              <a:rPr lang="en-US" sz="1600" dirty="0">
+              <a:rPr lang="en-US" sz="1400" dirty="0">
                 <a:solidFill>
                   <a:srgbClr val="000000"/>
                 </a:solidFill>
@@ -3836,19 +3635,128 @@
               <a:t>• 使用注册的账号登录
 </a:t>
             </a:r>
+            <a:endParaRPr lang="en-US" sz="1400" dirty="0"/>
+          </a:p>
+        </p:txBody>
+      </p:sp>
+      <p:sp>
+        <p:nvSpPr>
+          <p:cNvPr id="5" name="Text 3"/>
+          <p:cNvSpPr/>
+          <p:nvPr/>
+        </p:nvSpPr>
+        <p:spPr>
+          <a:xfrm>
+            <a:off x="5029200" y="1645920"/>
+            <a:ext cx="3657600" cy="548640"/>
+          </a:xfrm>
+          <a:prstGeom prst="rect">
+            <a:avLst/>
+          </a:prstGeom>
+          <a:noFill/>
+          <a:ln/>
+        </p:spPr>
+        <p:txBody>
+          <a:bodyPr wrap="square" rtlCol="0" anchor="ctr"/>
+          <a:lstStyle/>
+          <a:p>
+            <a:pPr indent="0" marL="0">
+              <a:buNone/>
+            </a:pPr>
+            <a:r>
+              <a:rPr lang="en-US" sz="1600" b="1" dirty="0">
+                <a:solidFill>
+                  <a:srgbClr val="548DD4"/>
+                </a:solidFill>
+              </a:rPr>
+              <a:t>2. 任务管理</a:t>
+            </a:r>
             <a:endParaRPr lang="en-US" sz="1600" dirty="0"/>
           </a:p>
         </p:txBody>
       </p:sp>
       <p:sp>
         <p:nvSpPr>
-          <p:cNvPr id="5" name="Text 3"/>
-          <p:cNvSpPr/>
-          <p:nvPr/>
-        </p:nvSpPr>
-        <p:spPr>
-          <a:xfrm>
-            <a:off x="5486400" y="1645920"/>
+          <p:cNvPr id="6" name="Text 4"/>
+          <p:cNvSpPr/>
+          <p:nvPr/>
+        </p:nvSpPr>
+        <p:spPr>
+          <a:xfrm>
+            <a:off x="5486400" y="2194560"/>
+            <a:ext cx="3657600" cy="1828800"/>
+          </a:xfrm>
+          <a:prstGeom prst="rect">
+            <a:avLst/>
+          </a:prstGeom>
+          <a:noFill/>
+          <a:ln/>
+        </p:spPr>
+        <p:txBody>
+          <a:bodyPr wrap="square" rtlCol="0" anchor="ctr"/>
+          <a:lstStyle/>
+          <a:p>
+            <a:pPr indent="0" marL="0">
+              <a:buNone/>
+            </a:pPr>
+            <a:r>
+              <a:rPr lang="en-US" sz="1400" dirty="0">
+                <a:solidFill>
+                  <a:srgbClr val="000000"/>
+                </a:solidFill>
+              </a:rPr>
+              <a:t>• 点击「添加任务」按钮创建任务
+</a:t>
+            </a:r>
+            <a:pPr indent="0" marL="0">
+              <a:buNone/>
+            </a:pPr>
+            <a:r>
+              <a:rPr lang="en-US" sz="1400" dirty="0">
+                <a:solidFill>
+                  <a:srgbClr val="000000"/>
+                </a:solidFill>
+              </a:rPr>
+              <a:t>• 点击任务查看详情
+</a:t>
+            </a:r>
+            <a:pPr indent="0" marL="0">
+              <a:buNone/>
+            </a:pPr>
+            <a:r>
+              <a:rPr lang="en-US" sz="1400" dirty="0">
+                <a:solidFill>
+                  <a:srgbClr val="000000"/>
+                </a:solidFill>
+              </a:rPr>
+              <a:t>• 点击「编辑」按钮修改任务
+</a:t>
+            </a:r>
+            <a:pPr indent="0" marL="0">
+              <a:buNone/>
+            </a:pPr>
+            <a:r>
+              <a:rPr lang="en-US" sz="1400" dirty="0">
+                <a:solidFill>
+                  <a:srgbClr val="000000"/>
+                </a:solidFill>
+              </a:rPr>
+              <a:t>• 点击「删除」按钮删除任务
+</a:t>
+            </a:r>
+            <a:endParaRPr lang="en-US" sz="1400" dirty="0"/>
+          </a:p>
+        </p:txBody>
+      </p:sp>
+      <p:sp>
+        <p:nvSpPr>
+          <p:cNvPr id="7" name="Text 5"/>
+          <p:cNvSpPr/>
+          <p:nvPr/>
+        </p:nvSpPr>
+        <p:spPr>
+          <a:xfrm>
+            <a:off x="457200" y="4023360"/>
             <a:ext cx="3657600" cy="548640"/>
           </a:xfrm>
           <a:prstGeom prst="rect">
@@ -3865,85 +3773,12 @@
               <a:buNone/>
             </a:pPr>
             <a:r>
-              <a:rPr lang="en-US" sz="1800" b="1" dirty="0">
+              <a:rPr lang="en-US" sz="1600" b="1" dirty="0">
                 <a:solidFill>
                   <a:srgbClr val="548DD4"/>
                 </a:solidFill>
               </a:rPr>
-              <a:t>2. 任务管理</a:t>
-            </a:r>
-            <a:endParaRPr lang="en-US" sz="1800" dirty="0"/>
-          </a:p>
-        </p:txBody>
-      </p:sp>
-      <p:sp>
-        <p:nvSpPr>
-          <p:cNvPr id="6" name="Text 4"/>
-          <p:cNvSpPr/>
-          <p:nvPr/>
-        </p:nvSpPr>
-        <p:spPr>
-          <a:xfrm>
-            <a:off x="5943600" y="2194560"/>
-            <a:ext cx="3657600" cy="1828800"/>
-          </a:xfrm>
-          <a:prstGeom prst="rect">
-            <a:avLst/>
-          </a:prstGeom>
-          <a:noFill/>
-          <a:ln/>
-        </p:spPr>
-        <p:txBody>
-          <a:bodyPr wrap="square" rtlCol="0" anchor="ctr"/>
-          <a:lstStyle/>
-          <a:p>
-            <a:pPr indent="0" marL="0">
-              <a:buNone/>
-            </a:pPr>
-            <a:r>
-              <a:rPr lang="en-US" sz="1600" dirty="0">
-                <a:solidFill>
-                  <a:srgbClr val="000000"/>
-                </a:solidFill>
-              </a:rPr>
-              <a:t>• 点击「添加任务」按钮创建任务
-</a:t>
-            </a:r>
-            <a:pPr indent="0" marL="0">
-              <a:buNone/>
-            </a:pPr>
-            <a:r>
-              <a:rPr lang="en-US" sz="1600" dirty="0">
-                <a:solidFill>
-                  <a:srgbClr val="000000"/>
-                </a:solidFill>
-              </a:rPr>
-              <a:t>• 点击任务查看详情
-</a:t>
-            </a:r>
-            <a:pPr indent="0" marL="0">
-              <a:buNone/>
-            </a:pPr>
-            <a:r>
-              <a:rPr lang="en-US" sz="1600" dirty="0">
-                <a:solidFill>
-                  <a:srgbClr val="000000"/>
-                </a:solidFill>
-              </a:rPr>
-              <a:t>• 点击「编辑」按钮修改任务
-</a:t>
-            </a:r>
-            <a:pPr indent="0" marL="0">
-              <a:buNone/>
-            </a:pPr>
-            <a:r>
-              <a:rPr lang="en-US" sz="1600" dirty="0">
-                <a:solidFill>
-                  <a:srgbClr val="000000"/>
-                </a:solidFill>
-              </a:rPr>
-              <a:t>• 点击「删除」按钮删除任务
-</a:t>
+              <a:t>3. 提醒设置</a:t>
             </a:r>
             <a:endParaRPr lang="en-US" sz="1600" dirty="0"/>
           </a:p>
@@ -3951,13 +3786,74 @@
       </p:sp>
       <p:sp>
         <p:nvSpPr>
-          <p:cNvPr id="7" name="Text 5"/>
-          <p:cNvSpPr/>
-          <p:nvPr/>
-        </p:nvSpPr>
-        <p:spPr>
-          <a:xfrm>
-            <a:off x="914400" y="4114800"/>
+          <p:cNvPr id="8" name="Text 6"/>
+          <p:cNvSpPr/>
+          <p:nvPr/>
+        </p:nvSpPr>
+        <p:spPr>
+          <a:xfrm>
+            <a:off x="914400" y="4572000"/>
+            <a:ext cx="3657600" cy="1645920"/>
+          </a:xfrm>
+          <a:prstGeom prst="rect">
+            <a:avLst/>
+          </a:prstGeom>
+          <a:noFill/>
+          <a:ln/>
+        </p:spPr>
+        <p:txBody>
+          <a:bodyPr wrap="square" rtlCol="0" anchor="ctr"/>
+          <a:lstStyle/>
+          <a:p>
+            <a:pPr indent="0" marL="0">
+              <a:buNone/>
+            </a:pPr>
+            <a:r>
+              <a:rPr lang="en-US" sz="1400" dirty="0">
+                <a:solidFill>
+                  <a:srgbClr val="000000"/>
+                </a:solidFill>
+              </a:rPr>
+              <a:t>• 设置提醒时间和周期
+</a:t>
+            </a:r>
+            <a:pPr indent="0" marL="0">
+              <a:buNone/>
+            </a:pPr>
+            <a:r>
+              <a:rPr lang="en-US" sz="1400" dirty="0">
+                <a:solidFill>
+                  <a:srgbClr val="000000"/>
+                </a:solidFill>
+              </a:rPr>
+              <a:t>• 上传自定义提醒音效
+</a:t>
+            </a:r>
+            <a:pPr indent="0" marL="0">
+              <a:buNone/>
+            </a:pPr>
+            <a:r>
+              <a:rPr lang="en-US" sz="1400" dirty="0">
+                <a:solidFill>
+                  <a:srgbClr val="000000"/>
+                </a:solidFill>
+              </a:rPr>
+              <a:t>• 任务到期时会收到实时提醒
+</a:t>
+            </a:r>
+            <a:endParaRPr lang="en-US" sz="1400" dirty="0"/>
+          </a:p>
+        </p:txBody>
+      </p:sp>
+      <p:sp>
+        <p:nvSpPr>
+          <p:cNvPr id="9" name="Text 7"/>
+          <p:cNvSpPr/>
+          <p:nvPr/>
+        </p:nvSpPr>
+        <p:spPr>
+          <a:xfrm>
+            <a:off x="5029200" y="4023360"/>
             <a:ext cx="3657600" cy="548640"/>
           </a:xfrm>
           <a:prstGeom prst="rect">
@@ -3974,73 +3870,12 @@
               <a:buNone/>
             </a:pPr>
             <a:r>
-              <a:rPr lang="en-US" sz="1800" b="1" dirty="0">
+              <a:rPr lang="en-US" sz="1600" b="1" dirty="0">
                 <a:solidFill>
                   <a:srgbClr val="548DD4"/>
                 </a:solidFill>
               </a:rPr>
-              <a:t>3. 提醒设置</a:t>
-            </a:r>
-            <a:endParaRPr lang="en-US" sz="1800" dirty="0"/>
-          </a:p>
-        </p:txBody>
-      </p:sp>
-      <p:sp>
-        <p:nvSpPr>
-          <p:cNvPr id="8" name="Text 6"/>
-          <p:cNvSpPr/>
-          <p:nvPr/>
-        </p:nvSpPr>
-        <p:spPr>
-          <a:xfrm>
-            <a:off x="1371600" y="4663440"/>
-            <a:ext cx="3657600" cy="1371600"/>
-          </a:xfrm>
-          <a:prstGeom prst="rect">
-            <a:avLst/>
-          </a:prstGeom>
-          <a:noFill/>
-          <a:ln/>
-        </p:spPr>
-        <p:txBody>
-          <a:bodyPr wrap="square" rtlCol="0" anchor="ctr"/>
-          <a:lstStyle/>
-          <a:p>
-            <a:pPr indent="0" marL="0">
-              <a:buNone/>
-            </a:pPr>
-            <a:r>
-              <a:rPr lang="en-US" sz="1600" dirty="0">
-                <a:solidFill>
-                  <a:srgbClr val="000000"/>
-                </a:solidFill>
-              </a:rPr>
-              <a:t>• 设置提醒时间和周期
-</a:t>
-            </a:r>
-            <a:pPr indent="0" marL="0">
-              <a:buNone/>
-            </a:pPr>
-            <a:r>
-              <a:rPr lang="en-US" sz="1600" dirty="0">
-                <a:solidFill>
-                  <a:srgbClr val="000000"/>
-                </a:solidFill>
-              </a:rPr>
-              <a:t>• 上传自定义提醒音效
-</a:t>
-            </a:r>
-            <a:pPr indent="0" marL="0">
-              <a:buNone/>
-            </a:pPr>
-            <a:r>
-              <a:rPr lang="en-US" sz="1600" dirty="0">
-                <a:solidFill>
-                  <a:srgbClr val="000000"/>
-                </a:solidFill>
-              </a:rPr>
-              <a:t>• 任务到期时会收到实时提醒
-</a:t>
+              <a:t>4. 统计与设置</a:t>
             </a:r>
             <a:endParaRPr lang="en-US" sz="1600" dirty="0"/>
           </a:p>
@@ -4048,66 +3883,30 @@
       </p:sp>
       <p:sp>
         <p:nvSpPr>
-          <p:cNvPr id="9" name="Text 7"/>
-          <p:cNvSpPr/>
-          <p:nvPr/>
-        </p:nvSpPr>
-        <p:spPr>
-          <a:xfrm>
-            <a:off x="5486400" y="4114800"/>
-            <a:ext cx="3657600" cy="548640"/>
-          </a:xfrm>
-          <a:prstGeom prst="rect">
-            <a:avLst/>
-          </a:prstGeom>
-          <a:noFill/>
-          <a:ln/>
-        </p:spPr>
-        <p:txBody>
-          <a:bodyPr wrap="square" rtlCol="0" anchor="ctr"/>
-          <a:lstStyle/>
-          <a:p>
-            <a:pPr indent="0" marL="0">
-              <a:buNone/>
-            </a:pPr>
-            <a:r>
-              <a:rPr lang="en-US" sz="1800" b="1" dirty="0">
-                <a:solidFill>
-                  <a:srgbClr val="548DD4"/>
-                </a:solidFill>
-              </a:rPr>
-              <a:t>4. 统计与设置</a:t>
-            </a:r>
-            <a:endParaRPr lang="en-US" sz="1800" dirty="0"/>
-          </a:p>
-        </p:txBody>
-      </p:sp>
-      <p:sp>
-        <p:nvSpPr>
           <p:cNvPr id="10" name="Text 8"/>
           <p:cNvSpPr/>
           <p:nvPr/>
         </p:nvSpPr>
         <p:spPr>
           <a:xfrm>
-            <a:off x="5943600" y="4663440"/>
-            <a:ext cx="3657600" cy="1371600"/>
-          </a:xfrm>
-          <a:prstGeom prst="rect">
-            <a:avLst/>
-          </a:prstGeom>
-          <a:noFill/>
-          <a:ln/>
-        </p:spPr>
-        <p:txBody>
-          <a:bodyPr wrap="square" rtlCol="0" anchor="ctr"/>
-          <a:lstStyle/>
-          <a:p>
-            <a:pPr indent="0" marL="0">
-              <a:buNone/>
-            </a:pPr>
-            <a:r>
-              <a:rPr lang="en-US" sz="1600" dirty="0">
+            <a:off x="5486400" y="4572000"/>
+            <a:ext cx="3657600" cy="1645920"/>
+          </a:xfrm>
+          <a:prstGeom prst="rect">
+            <a:avLst/>
+          </a:prstGeom>
+          <a:noFill/>
+          <a:ln/>
+        </p:spPr>
+        <p:txBody>
+          <a:bodyPr wrap="square" rtlCol="0" anchor="ctr"/>
+          <a:lstStyle/>
+          <a:p>
+            <a:pPr indent="0" marL="0">
+              <a:buNone/>
+            </a:pPr>
+            <a:r>
+              <a:rPr lang="en-US" sz="1400" dirty="0">
                 <a:solidFill>
                   <a:srgbClr val="000000"/>
                 </a:solidFill>
@@ -4119,7 +3918,7 @@
               <a:buNone/>
             </a:pPr>
             <a:r>
-              <a:rPr lang="en-US" sz="1600" dirty="0">
+              <a:rPr lang="en-US" sz="1400" dirty="0">
                 <a:solidFill>
                   <a:srgbClr val="000000"/>
                 </a:solidFill>
@@ -4131,7 +3930,7 @@
               <a:buNone/>
             </a:pPr>
             <a:r>
-              <a:rPr lang="en-US" sz="1600" dirty="0">
+              <a:rPr lang="en-US" sz="1400" dirty="0">
                 <a:solidFill>
                   <a:srgbClr val="000000"/>
                 </a:solidFill>
@@ -4139,7 +3938,7 @@
               <a:t>• 切换主题、语言、调整音量等
 </a:t>
             </a:r>
-            <a:endParaRPr lang="en-US" sz="1600" dirty="0"/>
+            <a:endParaRPr lang="en-US" sz="1400" dirty="0"/>
           </a:p>
         </p:txBody>
       </p:sp>
@@ -4176,8 +3975,8 @@
         </p:nvSpPr>
         <p:spPr>
           <a:xfrm>
-            <a:off x="0" y="457200"/>
-            <a:ext cx="9144000" cy="914400"/>
+            <a:off x="457200" y="457200"/>
+            <a:ext cx="8229600" cy="914400"/>
           </a:xfrm>
           <a:prstGeom prst="rect">
             <a:avLst/>
@@ -4193,14 +3992,14 @@
               <a:buNone/>
             </a:pPr>
             <a:r>
-              <a:rPr lang="en-US" sz="3200" b="1" dirty="0">
+              <a:rPr lang="en-US" sz="2800" b="1" dirty="0">
                 <a:solidFill>
                   <a:srgbClr val="366092"/>
                 </a:solidFill>
               </a:rPr>
               <a:t>管理员功能</a:t>
             </a:r>
-            <a:endParaRPr lang="en-US" sz="3200" dirty="0"/>
+            <a:endParaRPr lang="en-US" sz="2800" dirty="0"/>
           </a:p>
         </p:txBody>
       </p:sp>
@@ -4212,7 +4011,7 @@
         </p:nvSpPr>
         <p:spPr>
           <a:xfrm>
-            <a:off x="914400" y="1645920"/>
+            <a:off x="457200" y="1645920"/>
             <a:ext cx="8229600" cy="548640"/>
           </a:xfrm>
           <a:prstGeom prst="rect">
@@ -4229,14 +4028,14 @@
               <a:buNone/>
             </a:pPr>
             <a:r>
-              <a:rPr lang="en-US" sz="2000" b="1" dirty="0">
+              <a:rPr lang="en-US" sz="1800" b="1" dirty="0">
                 <a:solidFill>
                   <a:srgbClr val="000000"/>
                 </a:solidFill>
               </a:rPr>
               <a:t>1. 超级管理员登录</a:t>
             </a:r>
-            <a:endParaRPr lang="en-US" sz="2000" dirty="0"/>
+            <a:endParaRPr lang="en-US" sz="1800" dirty="0"/>
           </a:p>
         </p:txBody>
       </p:sp>
@@ -4248,7 +4047,7 @@
         </p:nvSpPr>
         <p:spPr>
           <a:xfrm>
-            <a:off x="1371600" y="2194560"/>
+            <a:off x="914400" y="2194560"/>
             <a:ext cx="8229600" cy="1371600"/>
           </a:xfrm>
           <a:prstGeom prst="rect">
@@ -4297,7 +4096,7 @@
         </p:nvSpPr>
         <p:spPr>
           <a:xfrm>
-            <a:off x="914400" y="3657600"/>
+            <a:off x="457200" y="3749040"/>
             <a:ext cx="8229600" cy="548640"/>
           </a:xfrm>
           <a:prstGeom prst="rect">
@@ -4314,14 +4113,14 @@
               <a:buNone/>
             </a:pPr>
             <a:r>
-              <a:rPr lang="en-US" sz="2000" b="1" dirty="0">
+              <a:rPr lang="en-US" sz="1800" b="1" dirty="0">
                 <a:solidFill>
                   <a:srgbClr val="000000"/>
                 </a:solidFill>
               </a:rPr>
               <a:t>2. 系统统计</a:t>
             </a:r>
-            <a:endParaRPr lang="en-US" sz="2000" dirty="0"/>
+            <a:endParaRPr lang="en-US" sz="1800" dirty="0"/>
           </a:p>
         </p:txBody>
       </p:sp>
@@ -4333,8 +4132,8 @@
         </p:nvSpPr>
         <p:spPr>
           <a:xfrm>
-            <a:off x="1371600" y="4206240"/>
-            <a:ext cx="8229600" cy="1828800"/>
+            <a:off x="914400" y="4297680"/>
+            <a:ext cx="8229600" cy="2011680"/>
           </a:xfrm>
           <a:prstGeom prst="rect">
             <a:avLst/>
@@ -4392,91 +4191,6 @@
                 </a:solidFill>
               </a:rPr>
               <a:t>• 查看任务完成趋势
-</a:t>
-            </a:r>
-            <a:endParaRPr lang="en-US" sz="1600" dirty="0"/>
-          </a:p>
-        </p:txBody>
-      </p:sp>
-      <p:sp>
-        <p:nvSpPr>
-          <p:cNvPr id="7" name="Text 5"/>
-          <p:cNvSpPr/>
-          <p:nvPr/>
-        </p:nvSpPr>
-        <p:spPr>
-          <a:xfrm>
-            <a:off x="914400" y="6217920"/>
-            <a:ext cx="8229600" cy="548640"/>
-          </a:xfrm>
-          <a:prstGeom prst="rect">
-            <a:avLst/>
-          </a:prstGeom>
-          <a:noFill/>
-          <a:ln/>
-        </p:spPr>
-        <p:txBody>
-          <a:bodyPr wrap="square" rtlCol="0" anchor="ctr"/>
-          <a:lstStyle/>
-          <a:p>
-            <a:pPr indent="0" marL="0">
-              <a:buNone/>
-            </a:pPr>
-            <a:r>
-              <a:rPr lang="en-US" sz="2000" b="1" dirty="0">
-                <a:solidFill>
-                  <a:srgbClr val="000000"/>
-                </a:solidFill>
-              </a:rPr>
-              <a:t>3. 用户管理</a:t>
-            </a:r>
-            <a:endParaRPr lang="en-US" sz="2000" dirty="0"/>
-          </a:p>
-        </p:txBody>
-      </p:sp>
-      <p:sp>
-        <p:nvSpPr>
-          <p:cNvPr id="8" name="Text 6"/>
-          <p:cNvSpPr/>
-          <p:nvPr/>
-        </p:nvSpPr>
-        <p:spPr>
-          <a:xfrm>
-            <a:off x="1371600" y="6766560"/>
-            <a:ext cx="8229600" cy="914400"/>
-          </a:xfrm>
-          <a:prstGeom prst="rect">
-            <a:avLst/>
-          </a:prstGeom>
-          <a:noFill/>
-          <a:ln/>
-        </p:spPr>
-        <p:txBody>
-          <a:bodyPr wrap="square" rtlCol="0" anchor="ctr"/>
-          <a:lstStyle/>
-          <a:p>
-            <a:pPr indent="0" marL="0">
-              <a:buNone/>
-            </a:pPr>
-            <a:r>
-              <a:rPr lang="en-US" sz="1600" dirty="0">
-                <a:solidFill>
-                  <a:srgbClr val="000000"/>
-                </a:solidFill>
-              </a:rPr>
-              <a:t>• 通过Django admin管理用户
-</a:t>
-            </a:r>
-            <a:pPr indent="0" marL="0">
-              <a:buNone/>
-            </a:pPr>
-            <a:r>
-              <a:rPr lang="en-US" sz="1600" dirty="0">
-                <a:solidFill>
-                  <a:srgbClr val="000000"/>
-                </a:solidFill>
-              </a:rPr>
-              <a:t>• 访问：http://localhost:8000/admin/
 </a:t>
             </a:r>
             <a:endParaRPr lang="en-US" sz="1600" dirty="0"/>
@@ -4516,8 +4230,8 @@
         </p:nvSpPr>
         <p:spPr>
           <a:xfrm>
-            <a:off x="0" y="457200"/>
-            <a:ext cx="9144000" cy="914400"/>
+            <a:off x="457200" y="457200"/>
+            <a:ext cx="8229600" cy="914400"/>
           </a:xfrm>
           <a:prstGeom prst="rect">
             <a:avLst/>
@@ -4533,14 +4247,14 @@
               <a:buNone/>
             </a:pPr>
             <a:r>
-              <a:rPr lang="en-US" sz="3200" b="1" dirty="0">
+              <a:rPr lang="en-US" sz="2800" b="1" dirty="0">
                 <a:solidFill>
                   <a:srgbClr val="366092"/>
                 </a:solidFill>
               </a:rPr>
               <a:t>技术特点</a:t>
             </a:r>
-            <a:endParaRPr lang="en-US" sz="3200" dirty="0"/>
+            <a:endParaRPr lang="en-US" sz="2800" dirty="0"/>
           </a:p>
         </p:txBody>
       </p:sp>
@@ -4552,8 +4266,8 @@
         </p:nvSpPr>
         <p:spPr>
           <a:xfrm>
-            <a:off x="914400" y="1828800"/>
-            <a:ext cx="8229600" cy="4572000"/>
+            <a:off x="914400" y="1645920"/>
+            <a:ext cx="7315200" cy="3657600"/>
           </a:xfrm>
           <a:prstGeom prst="rect">
             <a:avLst/>
@@ -4567,12 +4281,12 @@
           <a:p>
             <a:pPr indent="0" marL="0">
               <a:lnSpc>
-                <a:spcPts val="120"/>
+                <a:spcPts val="140"/>
               </a:lnSpc>
               <a:buNone/>
             </a:pPr>
             <a:r>
-              <a:rPr lang="en-US" sz="1800" dirty="0">
+              <a:rPr lang="en-US" sz="1600" dirty="0">
                 <a:solidFill>
                   <a:srgbClr val="000000"/>
                 </a:solidFill>
@@ -4582,12 +4296,12 @@
             </a:r>
             <a:pPr indent="0" marL="0">
               <a:lnSpc>
-                <a:spcPts val="120"/>
+                <a:spcPts val="140"/>
               </a:lnSpc>
               <a:buNone/>
             </a:pPr>
             <a:r>
-              <a:rPr lang="en-US" sz="1800" dirty="0">
+              <a:rPr lang="en-US" sz="1600" dirty="0">
                 <a:solidFill>
                   <a:srgbClr val="000000"/>
                 </a:solidFill>
@@ -4597,12 +4311,12 @@
             </a:r>
             <a:pPr indent="0" marL="0">
               <a:lnSpc>
-                <a:spcPts val="120"/>
+                <a:spcPts val="140"/>
               </a:lnSpc>
               <a:buNone/>
             </a:pPr>
             <a:r>
-              <a:rPr lang="en-US" sz="1800" dirty="0">
+              <a:rPr lang="en-US" sz="1600" dirty="0">
                 <a:solidFill>
                   <a:srgbClr val="000000"/>
                 </a:solidFill>
@@ -4612,12 +4326,12 @@
             </a:r>
             <a:pPr indent="0" marL="0">
               <a:lnSpc>
-                <a:spcPts val="120"/>
+                <a:spcPts val="140"/>
               </a:lnSpc>
               <a:buNone/>
             </a:pPr>
             <a:r>
-              <a:rPr lang="en-US" sz="1800" dirty="0">
+              <a:rPr lang="en-US" sz="1600" dirty="0">
                 <a:solidFill>
                   <a:srgbClr val="000000"/>
                 </a:solidFill>
@@ -4627,12 +4341,12 @@
             </a:r>
             <a:pPr indent="0" marL="0">
               <a:lnSpc>
-                <a:spcPts val="120"/>
+                <a:spcPts val="140"/>
               </a:lnSpc>
               <a:buNone/>
             </a:pPr>
             <a:r>
-              <a:rPr lang="en-US" sz="1800" dirty="0">
+              <a:rPr lang="en-US" sz="1600" dirty="0">
                 <a:solidFill>
                   <a:srgbClr val="000000"/>
                 </a:solidFill>
@@ -4642,12 +4356,12 @@
             </a:r>
             <a:pPr indent="0" marL="0">
               <a:lnSpc>
-                <a:spcPts val="120"/>
+                <a:spcPts val="140"/>
               </a:lnSpc>
               <a:buNone/>
             </a:pPr>
             <a:r>
-              <a:rPr lang="en-US" sz="1800" dirty="0">
+              <a:rPr lang="en-US" sz="1600" dirty="0">
                 <a:solidFill>
                   <a:srgbClr val="000000"/>
                 </a:solidFill>
@@ -4655,7 +4369,7 @@
               <a:t>6. 可扩展性：模块化设计，易于添加新功能
 </a:t>
             </a:r>
-            <a:endParaRPr lang="en-US" sz="1800" dirty="0"/>
+            <a:endParaRPr lang="en-US" sz="1600" dirty="0"/>
           </a:p>
         </p:txBody>
       </p:sp>
@@ -4692,8 +4406,8 @@
         </p:nvSpPr>
         <p:spPr>
           <a:xfrm>
-            <a:off x="0" y="457200"/>
-            <a:ext cx="9144000" cy="914400"/>
+            <a:off x="457200" y="457200"/>
+            <a:ext cx="8229600" cy="914400"/>
           </a:xfrm>
           <a:prstGeom prst="rect">
             <a:avLst/>
@@ -4709,14 +4423,14 @@
               <a:buNone/>
             </a:pPr>
             <a:r>
-              <a:rPr lang="en-US" sz="3200" b="1" dirty="0">
+              <a:rPr lang="en-US" sz="2800" b="1" dirty="0">
                 <a:solidFill>
                   <a:srgbClr val="366092"/>
                 </a:solidFill>
               </a:rPr>
               <a:t>常见问题</a:t>
             </a:r>
-            <a:endParaRPr lang="en-US" sz="3200" dirty="0"/>
+            <a:endParaRPr lang="en-US" sz="2800" dirty="0"/>
           </a:p>
         </p:txBody>
       </p:sp>
@@ -4728,7 +4442,7 @@
         </p:nvSpPr>
         <p:spPr>
           <a:xfrm>
-            <a:off x="914400" y="1645920"/>
+            <a:off x="457200" y="1645920"/>
             <a:ext cx="3657600" cy="548640"/>
           </a:xfrm>
           <a:prstGeom prst="rect">
@@ -4745,14 +4459,14 @@
               <a:buNone/>
             </a:pPr>
             <a:r>
-              <a:rPr lang="en-US" sz="1800" b="1" dirty="0">
+              <a:rPr lang="en-US" sz="1600" b="1" dirty="0">
                 <a:solidFill>
                   <a:srgbClr val="548DD4"/>
                 </a:solidFill>
               </a:rPr>
               <a:t>1. 提醒不工作</a:t>
             </a:r>
-            <a:endParaRPr lang="en-US" sz="1800" dirty="0"/>
+            <a:endParaRPr lang="en-US" sz="1600" dirty="0"/>
           </a:p>
         </p:txBody>
       </p:sp>
@@ -4764,7 +4478,104 @@
         </p:nvSpPr>
         <p:spPr>
           <a:xfrm>
-            <a:off x="1371600" y="2194560"/>
+            <a:off x="914400" y="2194560"/>
+            <a:ext cx="3657600" cy="1645920"/>
+          </a:xfrm>
+          <a:prstGeom prst="rect">
+            <a:avLst/>
+          </a:prstGeom>
+          <a:noFill/>
+          <a:ln/>
+        </p:spPr>
+        <p:txBody>
+          <a:bodyPr wrap="square" rtlCol="0" anchor="ctr"/>
+          <a:lstStyle/>
+          <a:p>
+            <a:pPr indent="0" marL="0">
+              <a:buNone/>
+            </a:pPr>
+            <a:r>
+              <a:rPr lang="en-US" sz="1400" dirty="0">
+                <a:solidFill>
+                  <a:srgbClr val="000000"/>
+                </a:solidFill>
+              </a:rPr>
+              <a:t>• 检查浏览器是否支持WebSocket
+</a:t>
+            </a:r>
+            <a:pPr indent="0" marL="0">
+              <a:buNone/>
+            </a:pPr>
+            <a:r>
+              <a:rPr lang="en-US" sz="1400" dirty="0">
+                <a:solidFill>
+                  <a:srgbClr val="000000"/>
+                </a:solidFill>
+              </a:rPr>
+              <a:t>• 确保Daphne服务器正在运行
+</a:t>
+            </a:r>
+            <a:pPr indent="0" marL="0">
+              <a:buNone/>
+            </a:pPr>
+            <a:r>
+              <a:rPr lang="en-US" sz="1400" dirty="0">
+                <a:solidFill>
+                  <a:srgbClr val="000000"/>
+                </a:solidFill>
+              </a:rPr>
+              <a:t>• 检查任务的提醒时间设置
+</a:t>
+            </a:r>
+            <a:endParaRPr lang="en-US" sz="1400" dirty="0"/>
+          </a:p>
+        </p:txBody>
+      </p:sp>
+      <p:sp>
+        <p:nvSpPr>
+          <p:cNvPr id="5" name="Text 3"/>
+          <p:cNvSpPr/>
+          <p:nvPr/>
+        </p:nvSpPr>
+        <p:spPr>
+          <a:xfrm>
+            <a:off x="5029200" y="1645920"/>
+            <a:ext cx="3657600" cy="548640"/>
+          </a:xfrm>
+          <a:prstGeom prst="rect">
+            <a:avLst/>
+          </a:prstGeom>
+          <a:noFill/>
+          <a:ln/>
+        </p:spPr>
+        <p:txBody>
+          <a:bodyPr wrap="square" rtlCol="0" anchor="ctr"/>
+          <a:lstStyle/>
+          <a:p>
+            <a:pPr indent="0" marL="0">
+              <a:buNone/>
+            </a:pPr>
+            <a:r>
+              <a:rPr lang="en-US" sz="1600" b="1" dirty="0">
+                <a:solidFill>
+                  <a:srgbClr val="548DD4"/>
+                </a:solidFill>
+              </a:rPr>
+              <a:t>2. 静态文件加载失败</a:t>
+            </a:r>
+            <a:endParaRPr lang="en-US" sz="1600" dirty="0"/>
+          </a:p>
+        </p:txBody>
+      </p:sp>
+      <p:sp>
+        <p:nvSpPr>
+          <p:cNvPr id="6" name="Text 4"/>
+          <p:cNvSpPr/>
+          <p:nvPr/>
+        </p:nvSpPr>
+        <p:spPr>
+          <a:xfrm>
+            <a:off x="5486400" y="2194560"/>
             <a:ext cx="3657600" cy="1371600"/>
           </a:xfrm>
           <a:prstGeom prst="rect">
@@ -4781,37 +4592,61 @@
               <a:buNone/>
             </a:pPr>
             <a:r>
-              <a:rPr lang="en-US" sz="1600" dirty="0">
-                <a:solidFill>
-                  <a:srgbClr val="000000"/>
-                </a:solidFill>
-              </a:rPr>
-              <a:t>• 检查浏览器是否支持WebSocket
-</a:t>
-            </a:r>
-            <a:pPr indent="0" marL="0">
-              <a:buNone/>
-            </a:pPr>
-            <a:r>
-              <a:rPr lang="en-US" sz="1600" dirty="0">
-                <a:solidFill>
-                  <a:srgbClr val="000000"/>
-                </a:solidFill>
-              </a:rPr>
-              <a:t>• 确保Daphne服务器正在运行
-</a:t>
-            </a:r>
-            <a:pPr indent="0" marL="0">
-              <a:buNone/>
-            </a:pPr>
-            <a:r>
-              <a:rPr lang="en-US" sz="1600" dirty="0">
-                <a:solidFill>
-                  <a:srgbClr val="000000"/>
-                </a:solidFill>
-              </a:rPr>
-              <a:t>• 检查任务的提醒时间设置
-</a:t>
+              <a:rPr lang="en-US" sz="1400" dirty="0">
+                <a:solidFill>
+                  <a:srgbClr val="000000"/>
+                </a:solidFill>
+              </a:rPr>
+              <a:t>• 运行 python manage.py collectstatic
+</a:t>
+            </a:r>
+            <a:pPr indent="0" marL="0">
+              <a:buNone/>
+            </a:pPr>
+            <a:r>
+              <a:rPr lang="en-US" sz="1400" dirty="0">
+                <a:solidFill>
+                  <a:srgbClr val="000000"/>
+                </a:solidFill>
+              </a:rPr>
+              <a:t>• 确保WhiteNoise配置正确
+</a:t>
+            </a:r>
+            <a:endParaRPr lang="en-US" sz="1400" dirty="0"/>
+          </a:p>
+        </p:txBody>
+      </p:sp>
+      <p:sp>
+        <p:nvSpPr>
+          <p:cNvPr id="7" name="Text 5"/>
+          <p:cNvSpPr/>
+          <p:nvPr/>
+        </p:nvSpPr>
+        <p:spPr>
+          <a:xfrm>
+            <a:off x="457200" y="4023360"/>
+            <a:ext cx="3657600" cy="548640"/>
+          </a:xfrm>
+          <a:prstGeom prst="rect">
+            <a:avLst/>
+          </a:prstGeom>
+          <a:noFill/>
+          <a:ln/>
+        </p:spPr>
+        <p:txBody>
+          <a:bodyPr wrap="square" rtlCol="0" anchor="ctr"/>
+          <a:lstStyle/>
+          <a:p>
+            <a:pPr indent="0" marL="0">
+              <a:buNone/>
+            </a:pPr>
+            <a:r>
+              <a:rPr lang="en-US" sz="1600" b="1" dirty="0">
+                <a:solidFill>
+                  <a:srgbClr val="548DD4"/>
+                </a:solidFill>
+              </a:rPr>
+              <a:t>3. 数据库连接失败</a:t>
             </a:r>
             <a:endParaRPr lang="en-US" sz="1600" dirty="0"/>
           </a:p>
@@ -4819,13 +4654,62 @@
       </p:sp>
       <p:sp>
         <p:nvSpPr>
-          <p:cNvPr id="5" name="Text 3"/>
-          <p:cNvSpPr/>
-          <p:nvPr/>
-        </p:nvSpPr>
-        <p:spPr>
-          <a:xfrm>
-            <a:off x="5486400" y="1645920"/>
+          <p:cNvPr id="8" name="Text 6"/>
+          <p:cNvSpPr/>
+          <p:nvPr/>
+        </p:nvSpPr>
+        <p:spPr>
+          <a:xfrm>
+            <a:off x="914400" y="4572000"/>
+            <a:ext cx="3657600" cy="1371600"/>
+          </a:xfrm>
+          <a:prstGeom prst="rect">
+            <a:avLst/>
+          </a:prstGeom>
+          <a:noFill/>
+          <a:ln/>
+        </p:spPr>
+        <p:txBody>
+          <a:bodyPr wrap="square" rtlCol="0" anchor="ctr"/>
+          <a:lstStyle/>
+          <a:p>
+            <a:pPr indent="0" marL="0">
+              <a:buNone/>
+            </a:pPr>
+            <a:r>
+              <a:rPr lang="en-US" sz="1400" dirty="0">
+                <a:solidFill>
+                  <a:srgbClr val="000000"/>
+                </a:solidFill>
+              </a:rPr>
+              <a:t>• 检查MySQL服务是否运行
+</a:t>
+            </a:r>
+            <a:pPr indent="0" marL="0">
+              <a:buNone/>
+            </a:pPr>
+            <a:r>
+              <a:rPr lang="en-US" sz="1400" dirty="0">
+                <a:solidFill>
+                  <a:srgbClr val="000000"/>
+                </a:solidFill>
+              </a:rPr>
+              <a:t>• 检查 my.cnf 中的连接信息
+</a:t>
+            </a:r>
+            <a:endParaRPr lang="en-US" sz="1400" dirty="0"/>
+          </a:p>
+        </p:txBody>
+      </p:sp>
+      <p:sp>
+        <p:nvSpPr>
+          <p:cNvPr id="9" name="Text 7"/>
+          <p:cNvSpPr/>
+          <p:nvPr/>
+        </p:nvSpPr>
+        <p:spPr>
+          <a:xfrm>
+            <a:off x="5029200" y="4023360"/>
             <a:ext cx="3657600" cy="548640"/>
           </a:xfrm>
           <a:prstGeom prst="rect">
@@ -4842,61 +4726,12 @@
               <a:buNone/>
             </a:pPr>
             <a:r>
-              <a:rPr lang="en-US" sz="1800" b="1" dirty="0">
+              <a:rPr lang="en-US" sz="1600" b="1" dirty="0">
                 <a:solidFill>
                   <a:srgbClr val="548DD4"/>
                 </a:solidFill>
               </a:rPr>
-              <a:t>2. 静态文件加载失败</a:t>
-            </a:r>
-            <a:endParaRPr lang="en-US" sz="1800" dirty="0"/>
-          </a:p>
-        </p:txBody>
-      </p:sp>
-      <p:sp>
-        <p:nvSpPr>
-          <p:cNvPr id="6" name="Text 4"/>
-          <p:cNvSpPr/>
-          <p:nvPr/>
-        </p:nvSpPr>
-        <p:spPr>
-          <a:xfrm>
-            <a:off x="5943600" y="2194560"/>
-            <a:ext cx="3657600" cy="914400"/>
-          </a:xfrm>
-          <a:prstGeom prst="rect">
-            <a:avLst/>
-          </a:prstGeom>
-          <a:noFill/>
-          <a:ln/>
-        </p:spPr>
-        <p:txBody>
-          <a:bodyPr wrap="square" rtlCol="0" anchor="ctr"/>
-          <a:lstStyle/>
-          <a:p>
-            <a:pPr indent="0" marL="0">
-              <a:buNone/>
-            </a:pPr>
-            <a:r>
-              <a:rPr lang="en-US" sz="1600" dirty="0">
-                <a:solidFill>
-                  <a:srgbClr val="000000"/>
-                </a:solidFill>
-              </a:rPr>
-              <a:t>• 运行 python manage.py collectstatic
-</a:t>
-            </a:r>
-            <a:pPr indent="0" marL="0">
-              <a:buNone/>
-            </a:pPr>
-            <a:r>
-              <a:rPr lang="en-US" sz="1600" dirty="0">
-                <a:solidFill>
-                  <a:srgbClr val="000000"/>
-                </a:solidFill>
-              </a:rPr>
-              <a:t>• 确保WhiteNoise配置正确
-</a:t>
+              <a:t>4. 头像上传失败</a:t>
             </a:r>
             <a:endParaRPr lang="en-US" sz="1600" dirty="0"/>
           </a:p>
@@ -4904,151 +4739,30 @@
       </p:sp>
       <p:sp>
         <p:nvSpPr>
-          <p:cNvPr id="7" name="Text 5"/>
-          <p:cNvSpPr/>
-          <p:nvPr/>
-        </p:nvSpPr>
-        <p:spPr>
-          <a:xfrm>
-            <a:off x="914400" y="4114800"/>
-            <a:ext cx="3657600" cy="548640"/>
-          </a:xfrm>
-          <a:prstGeom prst="rect">
-            <a:avLst/>
-          </a:prstGeom>
-          <a:noFill/>
-          <a:ln/>
-        </p:spPr>
-        <p:txBody>
-          <a:bodyPr wrap="square" rtlCol="0" anchor="ctr"/>
-          <a:lstStyle/>
-          <a:p>
-            <a:pPr indent="0" marL="0">
-              <a:buNone/>
-            </a:pPr>
-            <a:r>
-              <a:rPr lang="en-US" sz="1800" b="1" dirty="0">
-                <a:solidFill>
-                  <a:srgbClr val="548DD4"/>
-                </a:solidFill>
-              </a:rPr>
-              <a:t>3. 数据库连接失败</a:t>
-            </a:r>
-            <a:endParaRPr lang="en-US" sz="1800" dirty="0"/>
-          </a:p>
-        </p:txBody>
-      </p:sp>
-      <p:sp>
-        <p:nvSpPr>
-          <p:cNvPr id="8" name="Text 6"/>
-          <p:cNvSpPr/>
-          <p:nvPr/>
-        </p:nvSpPr>
-        <p:spPr>
-          <a:xfrm>
-            <a:off x="1371600" y="4663440"/>
-            <a:ext cx="3657600" cy="914400"/>
-          </a:xfrm>
-          <a:prstGeom prst="rect">
-            <a:avLst/>
-          </a:prstGeom>
-          <a:noFill/>
-          <a:ln/>
-        </p:spPr>
-        <p:txBody>
-          <a:bodyPr wrap="square" rtlCol="0" anchor="ctr"/>
-          <a:lstStyle/>
-          <a:p>
-            <a:pPr indent="0" marL="0">
-              <a:buNone/>
-            </a:pPr>
-            <a:r>
-              <a:rPr lang="en-US" sz="1600" dirty="0">
-                <a:solidFill>
-                  <a:srgbClr val="000000"/>
-                </a:solidFill>
-              </a:rPr>
-              <a:t>• 检查MySQL服务是否运行
-</a:t>
-            </a:r>
-            <a:pPr indent="0" marL="0">
-              <a:buNone/>
-            </a:pPr>
-            <a:r>
-              <a:rPr lang="en-US" sz="1600" dirty="0">
-                <a:solidFill>
-                  <a:srgbClr val="000000"/>
-                </a:solidFill>
-              </a:rPr>
-              <a:t>• 检查 my.cnf 中的连接信息
-</a:t>
-            </a:r>
-            <a:endParaRPr lang="en-US" sz="1600" dirty="0"/>
-          </a:p>
-        </p:txBody>
-      </p:sp>
-      <p:sp>
-        <p:nvSpPr>
-          <p:cNvPr id="9" name="Text 7"/>
-          <p:cNvSpPr/>
-          <p:nvPr/>
-        </p:nvSpPr>
-        <p:spPr>
-          <a:xfrm>
-            <a:off x="5486400" y="4114800"/>
-            <a:ext cx="3657600" cy="548640"/>
-          </a:xfrm>
-          <a:prstGeom prst="rect">
-            <a:avLst/>
-          </a:prstGeom>
-          <a:noFill/>
-          <a:ln/>
-        </p:spPr>
-        <p:txBody>
-          <a:bodyPr wrap="square" rtlCol="0" anchor="ctr"/>
-          <a:lstStyle/>
-          <a:p>
-            <a:pPr indent="0" marL="0">
-              <a:buNone/>
-            </a:pPr>
-            <a:r>
-              <a:rPr lang="en-US" sz="1800" b="1" dirty="0">
-                <a:solidFill>
-                  <a:srgbClr val="548DD4"/>
-                </a:solidFill>
-              </a:rPr>
-              <a:t>4. 头像上传失败</a:t>
-            </a:r>
-            <a:endParaRPr lang="en-US" sz="1800" dirty="0"/>
-          </a:p>
-        </p:txBody>
-      </p:sp>
-      <p:sp>
-        <p:nvSpPr>
           <p:cNvPr id="10" name="Text 8"/>
           <p:cNvSpPr/>
           <p:nvPr/>
         </p:nvSpPr>
         <p:spPr>
           <a:xfrm>
-            <a:off x="5943600" y="4663440"/>
-            <a:ext cx="3657600" cy="914400"/>
-          </a:xfrm>
-          <a:prstGeom prst="rect">
-            <a:avLst/>
-          </a:prstGeom>
-          <a:noFill/>
-          <a:ln/>
-        </p:spPr>
-        <p:txBody>
-          <a:bodyPr wrap="square" rtlCol="0" anchor="ctr"/>
-          <a:lstStyle/>
-          <a:p>
-            <a:pPr indent="0" marL="0">
-              <a:buNone/>
-            </a:pPr>
-            <a:r>
-              <a:rPr lang="en-US" sz="1600" dirty="0">
+            <a:off x="5486400" y="4572000"/>
+            <a:ext cx="3657600" cy="1371600"/>
+          </a:xfrm>
+          <a:prstGeom prst="rect">
+            <a:avLst/>
+          </a:prstGeom>
+          <a:noFill/>
+          <a:ln/>
+        </p:spPr>
+        <p:txBody>
+          <a:bodyPr wrap="square" rtlCol="0" anchor="ctr"/>
+          <a:lstStyle/>
+          <a:p>
+            <a:pPr indent="0" marL="0">
+              <a:buNone/>
+            </a:pPr>
+            <a:r>
+              <a:rPr lang="en-US" sz="1400" dirty="0">
                 <a:solidFill>
                   <a:srgbClr val="000000"/>
                 </a:solidFill>
@@ -5060,7 +4774,7 @@
               <a:buNone/>
             </a:pPr>
             <a:r>
-              <a:rPr lang="en-US" sz="1600" dirty="0">
+              <a:rPr lang="en-US" sz="1400" dirty="0">
                 <a:solidFill>
                   <a:srgbClr val="000000"/>
                 </a:solidFill>
@@ -5068,7 +4782,7 @@
               <a:t>• 确保Pillow已安装
 </a:t>
             </a:r>
-            <a:endParaRPr lang="en-US" sz="1600" dirty="0"/>
+            <a:endParaRPr lang="en-US" sz="1400" dirty="0"/>
           </a:p>
         </p:txBody>
       </p:sp>
@@ -5105,8 +4819,8 @@
         </p:nvSpPr>
         <p:spPr>
           <a:xfrm>
-            <a:off x="0" y="457200"/>
-            <a:ext cx="9144000" cy="914400"/>
+            <a:off x="457200" y="457200"/>
+            <a:ext cx="8229600" cy="914400"/>
           </a:xfrm>
           <a:prstGeom prst="rect">
             <a:avLst/>
@@ -5122,14 +4836,14 @@
               <a:buNone/>
             </a:pPr>
             <a:r>
-              <a:rPr lang="en-US" sz="3200" b="1" dirty="0">
+              <a:rPr lang="en-US" sz="2800" b="1" dirty="0">
                 <a:solidFill>
                   <a:srgbClr val="366092"/>
                 </a:solidFill>
               </a:rPr>
               <a:t>开发与扩展</a:t>
             </a:r>
-            <a:endParaRPr lang="en-US" sz="3200" dirty="0"/>
+            <a:endParaRPr lang="en-US" sz="2800" dirty="0"/>
           </a:p>
         </p:txBody>
       </p:sp>
@@ -5141,7 +4855,7 @@
         </p:nvSpPr>
         <p:spPr>
           <a:xfrm>
-            <a:off x="914400" y="1645920"/>
+            <a:off x="457200" y="1645920"/>
             <a:ext cx="3657600" cy="548640"/>
           </a:xfrm>
           <a:prstGeom prst="rect">
@@ -5158,14 +4872,14 @@
               <a:buNone/>
             </a:pPr>
             <a:r>
-              <a:rPr lang="en-US" sz="1800" b="1" dirty="0">
+              <a:rPr lang="en-US" sz="1600" b="1" dirty="0">
                 <a:solidFill>
                   <a:srgbClr val="548DD4"/>
                 </a:solidFill>
               </a:rPr>
               <a:t>1. 添加新功能</a:t>
             </a:r>
-            <a:endParaRPr lang="en-US" sz="1800" dirty="0"/>
+            <a:endParaRPr lang="en-US" sz="1600" dirty="0"/>
           </a:p>
         </p:txBody>
       </p:sp>
@@ -5177,24 +4891,24 @@
         </p:nvSpPr>
         <p:spPr>
           <a:xfrm>
-            <a:off x="1371600" y="2194560"/>
-            <a:ext cx="3657600" cy="1371600"/>
-          </a:xfrm>
-          <a:prstGeom prst="rect">
-            <a:avLst/>
-          </a:prstGeom>
-          <a:noFill/>
-          <a:ln/>
-        </p:spPr>
-        <p:txBody>
-          <a:bodyPr wrap="square" rtlCol="0" anchor="ctr"/>
-          <a:lstStyle/>
-          <a:p>
-            <a:pPr indent="0" marL="0">
-              <a:buNone/>
-            </a:pPr>
-            <a:r>
-              <a:rPr lang="en-US" sz="1600" dirty="0">
+            <a:off x="914400" y="2194560"/>
+            <a:ext cx="3657600" cy="1828800"/>
+          </a:xfrm>
+          <a:prstGeom prst="rect">
+            <a:avLst/>
+          </a:prstGeom>
+          <a:noFill/>
+          <a:ln/>
+        </p:spPr>
+        <p:txBody>
+          <a:bodyPr wrap="square" rtlCol="0" anchor="ctr"/>
+          <a:lstStyle/>
+          <a:p>
+            <a:pPr indent="0" marL="0">
+              <a:buNone/>
+            </a:pPr>
+            <a:r>
+              <a:rPr lang="en-US" sz="1400" dirty="0">
                 <a:solidFill>
                   <a:srgbClr val="000000"/>
                 </a:solidFill>
@@ -5206,7 +4920,7 @@
               <a:buNone/>
             </a:pPr>
             <a:r>
-              <a:rPr lang="en-US" sz="1600" dirty="0">
+              <a:rPr lang="en-US" sz="1400" dirty="0">
                 <a:solidFill>
                   <a:srgbClr val="000000"/>
                 </a:solidFill>
@@ -5218,7 +4932,7 @@
               <a:buNone/>
             </a:pPr>
             <a:r>
-              <a:rPr lang="en-US" sz="1600" dirty="0">
+              <a:rPr lang="en-US" sz="1400" dirty="0">
                 <a:solidFill>
                   <a:srgbClr val="000000"/>
                 </a:solidFill>
@@ -5226,102 +4940,138 @@
               <a:t>• 在 templates/task_reminder/ 中添加新模板
 </a:t>
             </a:r>
+            <a:endParaRPr lang="en-US" sz="1400" dirty="0"/>
+          </a:p>
+        </p:txBody>
+      </p:sp>
+      <p:sp>
+        <p:nvSpPr>
+          <p:cNvPr id="5" name="Text 3"/>
+          <p:cNvSpPr/>
+          <p:nvPr/>
+        </p:nvSpPr>
+        <p:spPr>
+          <a:xfrm>
+            <a:off x="5029200" y="1645920"/>
+            <a:ext cx="3657600" cy="548640"/>
+          </a:xfrm>
+          <a:prstGeom prst="rect">
+            <a:avLst/>
+          </a:prstGeom>
+          <a:noFill/>
+          <a:ln/>
+        </p:spPr>
+        <p:txBody>
+          <a:bodyPr wrap="square" rtlCol="0" anchor="ctr"/>
+          <a:lstStyle/>
+          <a:p>
+            <a:pPr indent="0" marL="0">
+              <a:buNone/>
+            </a:pPr>
+            <a:r>
+              <a:rPr lang="en-US" sz="1600" b="1" dirty="0">
+                <a:solidFill>
+                  <a:srgbClr val="548DD4"/>
+                </a:solidFill>
+              </a:rPr>
+              <a:t>2. 数据库模型扩展</a:t>
+            </a:r>
             <a:endParaRPr lang="en-US" sz="1600" dirty="0"/>
           </a:p>
         </p:txBody>
       </p:sp>
       <p:sp>
         <p:nvSpPr>
-          <p:cNvPr id="5" name="Text 3"/>
-          <p:cNvSpPr/>
-          <p:nvPr/>
-        </p:nvSpPr>
-        <p:spPr>
-          <a:xfrm>
-            <a:off x="5486400" y="1645920"/>
-            <a:ext cx="3657600" cy="548640"/>
-          </a:xfrm>
-          <a:prstGeom prst="rect">
-            <a:avLst/>
-          </a:prstGeom>
-          <a:noFill/>
-          <a:ln/>
-        </p:spPr>
-        <p:txBody>
-          <a:bodyPr wrap="square" rtlCol="0" anchor="ctr"/>
-          <a:lstStyle/>
-          <a:p>
-            <a:pPr indent="0" marL="0">
-              <a:buNone/>
-            </a:pPr>
-            <a:r>
-              <a:rPr lang="en-US" sz="1800" b="1" dirty="0">
+          <p:cNvPr id="6" name="Text 4"/>
+          <p:cNvSpPr/>
+          <p:nvPr/>
+        </p:nvSpPr>
+        <p:spPr>
+          <a:xfrm>
+            <a:off x="5486400" y="2194560"/>
+            <a:ext cx="3657600" cy="1828800"/>
+          </a:xfrm>
+          <a:prstGeom prst="rect">
+            <a:avLst/>
+          </a:prstGeom>
+          <a:noFill/>
+          <a:ln/>
+        </p:spPr>
+        <p:txBody>
+          <a:bodyPr wrap="square" rtlCol="0" anchor="ctr"/>
+          <a:lstStyle/>
+          <a:p>
+            <a:pPr indent="0" marL="0">
+              <a:buNone/>
+            </a:pPr>
+            <a:r>
+              <a:rPr lang="en-US" sz="1400" dirty="0">
+                <a:solidFill>
+                  <a:srgbClr val="000000"/>
+                </a:solidFill>
+              </a:rPr>
+              <a:t>• 在 task_reminder/models.py 中修改模型
+</a:t>
+            </a:r>
+            <a:pPr indent="0" marL="0">
+              <a:buNone/>
+            </a:pPr>
+            <a:r>
+              <a:rPr lang="en-US" sz="1400" dirty="0">
+                <a:solidFill>
+                  <a:srgbClr val="000000"/>
+                </a:solidFill>
+              </a:rPr>
+              <a:t>• 运行 python manage.py makemigrations
+</a:t>
+            </a:r>
+            <a:pPr indent="0" marL="0">
+              <a:buNone/>
+            </a:pPr>
+            <a:r>
+              <a:rPr lang="en-US" sz="1400" dirty="0">
+                <a:solidFill>
+                  <a:srgbClr val="000000"/>
+                </a:solidFill>
+              </a:rPr>
+              <a:t>• 运行 python manage.py migrate
+</a:t>
+            </a:r>
+            <a:endParaRPr lang="en-US" sz="1400" dirty="0"/>
+          </a:p>
+        </p:txBody>
+      </p:sp>
+      <p:sp>
+        <p:nvSpPr>
+          <p:cNvPr id="7" name="Text 5"/>
+          <p:cNvSpPr/>
+          <p:nvPr/>
+        </p:nvSpPr>
+        <p:spPr>
+          <a:xfrm>
+            <a:off x="457200" y="4206240"/>
+            <a:ext cx="8229600" cy="548640"/>
+          </a:xfrm>
+          <a:prstGeom prst="rect">
+            <a:avLst/>
+          </a:prstGeom>
+          <a:noFill/>
+          <a:ln/>
+        </p:spPr>
+        <p:txBody>
+          <a:bodyPr wrap="square" rtlCol="0" anchor="ctr"/>
+          <a:lstStyle/>
+          <a:p>
+            <a:pPr indent="0" marL="0">
+              <a:buNone/>
+            </a:pPr>
+            <a:r>
+              <a:rPr lang="en-US" sz="1600" b="1" dirty="0">
                 <a:solidFill>
                   <a:srgbClr val="548DD4"/>
                 </a:solidFill>
               </a:rPr>
-              <a:t>2. 数据库模型扩展</a:t>
-            </a:r>
-            <a:endParaRPr lang="en-US" sz="1800" dirty="0"/>
-          </a:p>
-        </p:txBody>
-      </p:sp>
-      <p:sp>
-        <p:nvSpPr>
-          <p:cNvPr id="6" name="Text 4"/>
-          <p:cNvSpPr/>
-          <p:nvPr/>
-        </p:nvSpPr>
-        <p:spPr>
-          <a:xfrm>
-            <a:off x="5943600" y="2194560"/>
-            <a:ext cx="3657600" cy="1371600"/>
-          </a:xfrm>
-          <a:prstGeom prst="rect">
-            <a:avLst/>
-          </a:prstGeom>
-          <a:noFill/>
-          <a:ln/>
-        </p:spPr>
-        <p:txBody>
-          <a:bodyPr wrap="square" rtlCol="0" anchor="ctr"/>
-          <a:lstStyle/>
-          <a:p>
-            <a:pPr indent="0" marL="0">
-              <a:buNone/>
-            </a:pPr>
-            <a:r>
-              <a:rPr lang="en-US" sz="1600" dirty="0">
-                <a:solidFill>
-                  <a:srgbClr val="000000"/>
-                </a:solidFill>
-              </a:rPr>
-              <a:t>• 在 task_reminder/models.py 中修改模型
-</a:t>
-            </a:r>
-            <a:pPr indent="0" marL="0">
-              <a:buNone/>
-            </a:pPr>
-            <a:r>
-              <a:rPr lang="en-US" sz="1600" dirty="0">
-                <a:solidFill>
-                  <a:srgbClr val="000000"/>
-                </a:solidFill>
-              </a:rPr>
-              <a:t>• 运行 python manage.py makemigrations
-</a:t>
-            </a:r>
-            <a:pPr indent="0" marL="0">
-              <a:buNone/>
-            </a:pPr>
-            <a:r>
-              <a:rPr lang="en-US" sz="1600" dirty="0">
-                <a:solidFill>
-                  <a:srgbClr val="000000"/>
-                </a:solidFill>
-              </a:rPr>
-              <a:t>• 运行 python manage.py migrate
-</a:t>
+              <a:t>3. 前端开发</a:t>
             </a:r>
             <a:endParaRPr lang="en-US" sz="1600" dirty="0"/>
           </a:p>
@@ -5329,66 +5079,30 @@
       </p:sp>
       <p:sp>
         <p:nvSpPr>
-          <p:cNvPr id="7" name="Text 5"/>
-          <p:cNvSpPr/>
-          <p:nvPr/>
-        </p:nvSpPr>
-        <p:spPr>
-          <a:xfrm>
-            <a:off x="914400" y="4114800"/>
-            <a:ext cx="8229600" cy="548640"/>
-          </a:xfrm>
-          <a:prstGeom prst="rect">
-            <a:avLst/>
-          </a:prstGeom>
-          <a:noFill/>
-          <a:ln/>
-        </p:spPr>
-        <p:txBody>
-          <a:bodyPr wrap="square" rtlCol="0" anchor="ctr"/>
-          <a:lstStyle/>
-          <a:p>
-            <a:pPr indent="0" marL="0">
-              <a:buNone/>
-            </a:pPr>
-            <a:r>
-              <a:rPr lang="en-US" sz="1800" b="1" dirty="0">
-                <a:solidFill>
-                  <a:srgbClr val="548DD4"/>
-                </a:solidFill>
-              </a:rPr>
-              <a:t>3. 前端开发</a:t>
-            </a:r>
-            <a:endParaRPr lang="en-US" sz="1800" dirty="0"/>
-          </a:p>
-        </p:txBody>
-      </p:sp>
-      <p:sp>
-        <p:nvSpPr>
           <p:cNvPr id="8" name="Text 6"/>
           <p:cNvSpPr/>
           <p:nvPr/>
         </p:nvSpPr>
         <p:spPr>
           <a:xfrm>
-            <a:off x="1371600" y="4663440"/>
-            <a:ext cx="8229600" cy="1371600"/>
-          </a:xfrm>
-          <a:prstGeom prst="rect">
-            <a:avLst/>
-          </a:prstGeom>
-          <a:noFill/>
-          <a:ln/>
-        </p:spPr>
-        <p:txBody>
-          <a:bodyPr wrap="square" rtlCol="0" anchor="ctr"/>
-          <a:lstStyle/>
-          <a:p>
-            <a:pPr indent="0" marL="0">
-              <a:buNone/>
-            </a:pPr>
-            <a:r>
-              <a:rPr lang="en-US" sz="1600" dirty="0">
+            <a:off x="914400" y="4754880"/>
+            <a:ext cx="8229600" cy="1645920"/>
+          </a:xfrm>
+          <a:prstGeom prst="rect">
+            <a:avLst/>
+          </a:prstGeom>
+          <a:noFill/>
+          <a:ln/>
+        </p:spPr>
+        <p:txBody>
+          <a:bodyPr wrap="square" rtlCol="0" anchor="ctr"/>
+          <a:lstStyle/>
+          <a:p>
+            <a:pPr indent="0" marL="0">
+              <a:buNone/>
+            </a:pPr>
+            <a:r>
+              <a:rPr lang="en-US" sz="1400" dirty="0">
                 <a:solidFill>
                   <a:srgbClr val="000000"/>
                 </a:solidFill>
@@ -5400,7 +5114,7 @@
               <a:buNone/>
             </a:pPr>
             <a:r>
-              <a:rPr lang="en-US" sz="1600" dirty="0">
+              <a:rPr lang="en-US" sz="1400" dirty="0">
                 <a:solidFill>
                   <a:srgbClr val="000000"/>
                 </a:solidFill>
@@ -5412,7 +5126,7 @@
               <a:buNone/>
             </a:pPr>
             <a:r>
-              <a:rPr lang="en-US" sz="1600" dirty="0">
+              <a:rPr lang="en-US" sz="1400" dirty="0">
                 <a:solidFill>
                   <a:srgbClr val="000000"/>
                 </a:solidFill>
@@ -5420,7 +5134,7 @@
               <a:t>• CSS文件位于 static/css/ 目录
 </a:t>
             </a:r>
-            <a:endParaRPr lang="en-US" sz="1600" dirty="0"/>
+            <a:endParaRPr lang="en-US" sz="1400" dirty="0"/>
           </a:p>
         </p:txBody>
       </p:sp>
@@ -5457,8 +5171,8 @@
         </p:nvSpPr>
         <p:spPr>
           <a:xfrm>
-            <a:off x="0" y="457200"/>
-            <a:ext cx="9144000" cy="914400"/>
+            <a:off x="457200" y="457200"/>
+            <a:ext cx="8229600" cy="914400"/>
           </a:xfrm>
           <a:prstGeom prst="rect">
             <a:avLst/>
@@ -5474,14 +5188,14 @@
               <a:buNone/>
             </a:pPr>
             <a:r>
-              <a:rPr lang="en-US" sz="3200" b="1" dirty="0">
+              <a:rPr lang="en-US" sz="2800" b="1" dirty="0">
                 <a:solidFill>
                   <a:srgbClr val="366092"/>
                 </a:solidFill>
               </a:rPr>
               <a:t>项目总结</a:t>
             </a:r>
-            <a:endParaRPr lang="en-US" sz="3200" dirty="0"/>
+            <a:endParaRPr lang="en-US" sz="2800" dirty="0"/>
           </a:p>
         </p:txBody>
       </p:sp>
@@ -5493,8 +5207,8 @@
         </p:nvSpPr>
         <p:spPr>
           <a:xfrm>
-            <a:off x="914400" y="1828800"/>
-            <a:ext cx="8229600" cy="4572000"/>
+            <a:off x="914400" y="1645920"/>
+            <a:ext cx="7315200" cy="3657600"/>
           </a:xfrm>
           <a:prstGeom prst="rect">
             <a:avLst/>
@@ -5508,12 +5222,12 @@
           <a:p>
             <a:pPr indent="0" marL="0">
               <a:lnSpc>
-                <a:spcPts val="120"/>
+                <a:spcPts val="140"/>
               </a:lnSpc>
               <a:buNone/>
             </a:pPr>
             <a:r>
-              <a:rPr lang="en-US" sz="1800" dirty="0">
+              <a:rPr lang="en-US" sz="1600" dirty="0">
                 <a:solidFill>
                   <a:srgbClr val="000000"/>
                 </a:solidFill>
@@ -5523,12 +5237,12 @@
             </a:r>
             <a:pPr indent="0" marL="0">
               <a:lnSpc>
-                <a:spcPts val="120"/>
+                <a:spcPts val="140"/>
               </a:lnSpc>
               <a:buNone/>
             </a:pPr>
             <a:r>
-              <a:rPr lang="en-US" sz="1800" dirty="0">
+              <a:rPr lang="en-US" sz="1600" dirty="0">
                 <a:solidFill>
                   <a:srgbClr val="000000"/>
                 </a:solidFill>
@@ -5538,12 +5252,12 @@
             </a:r>
             <a:pPr indent="0" marL="0">
               <a:lnSpc>
-                <a:spcPts val="120"/>
+                <a:spcPts val="140"/>
               </a:lnSpc>
               <a:buNone/>
             </a:pPr>
             <a:r>
-              <a:rPr lang="en-US" sz="1800" dirty="0">
+              <a:rPr lang="en-US" sz="1600" dirty="0">
                 <a:solidFill>
                   <a:srgbClr val="000000"/>
                 </a:solidFill>
@@ -5553,12 +5267,12 @@
             </a:r>
             <a:pPr indent="0" marL="0">
               <a:lnSpc>
-                <a:spcPts val="120"/>
+                <a:spcPts val="140"/>
               </a:lnSpc>
               <a:buNone/>
             </a:pPr>
             <a:r>
-              <a:rPr lang="en-US" sz="1800" dirty="0">
+              <a:rPr lang="en-US" sz="1600" dirty="0">
                 <a:solidFill>
                   <a:srgbClr val="000000"/>
                 </a:solidFill>
@@ -5568,12 +5282,12 @@
             </a:r>
             <a:pPr indent="0" marL="0">
               <a:lnSpc>
-                <a:spcPts val="120"/>
+                <a:spcPts val="140"/>
               </a:lnSpc>
               <a:buNone/>
             </a:pPr>
             <a:r>
-              <a:rPr lang="en-US" sz="1800" dirty="0">
+              <a:rPr lang="en-US" sz="1600" dirty="0">
                 <a:solidFill>
                   <a:srgbClr val="000000"/>
                 </a:solidFill>
@@ -5583,12 +5297,12 @@
             </a:r>
             <a:pPr indent="0" marL="0">
               <a:lnSpc>
-                <a:spcPts val="120"/>
+                <a:spcPts val="140"/>
               </a:lnSpc>
               <a:buNone/>
             </a:pPr>
             <a:r>
-              <a:rPr lang="en-US" sz="1800" dirty="0">
+              <a:rPr lang="en-US" sz="1600" dirty="0">
                 <a:solidFill>
                   <a:srgbClr val="000000"/>
                 </a:solidFill>
@@ -5598,12 +5312,12 @@
             </a:r>
             <a:pPr indent="0" marL="0">
               <a:lnSpc>
-                <a:spcPts val="120"/>
+                <a:spcPts val="140"/>
               </a:lnSpc>
               <a:buNone/>
             </a:pPr>
             <a:r>
-              <a:rPr lang="en-US" sz="1800" dirty="0">
+              <a:rPr lang="en-US" sz="1600" dirty="0">
                 <a:solidFill>
                   <a:srgbClr val="000000"/>
                 </a:solidFill>
@@ -5613,173 +5327,28 @@
             </a:r>
             <a:pPr indent="0" marL="0">
               <a:lnSpc>
-                <a:spcPts val="120"/>
+                <a:spcPts val="140"/>
               </a:lnSpc>
               <a:buNone/>
             </a:pPr>
-            <a:endParaRPr lang="en-US" sz="1800" dirty="0"/>
+            <a:endParaRPr lang="en-US" sz="1600" dirty="0"/>
           </a:p>
           <a:p>
             <a:pPr indent="0" marL="0">
               <a:lnSpc>
-                <a:spcPts val="120"/>
+                <a:spcPts val="140"/>
               </a:lnSpc>
               <a:buNone/>
             </a:pPr>
             <a:r>
-              <a:rPr lang="en-US" sz="1800" dirty="0">
+              <a:rPr lang="en-US" sz="1600" dirty="0">
                 <a:solidFill>
                   <a:srgbClr val="000000"/>
                 </a:solidFill>
               </a:rPr>
               <a:t>项目采用模块化设计，易于扩展和维护，是一个理想的任务管理解决方案。</a:t>
             </a:r>
-            <a:endParaRPr lang="en-US" sz="1800" dirty="0"/>
-          </a:p>
-        </p:txBody>
-      </p:sp>
-    </p:spTree>
-  </p:cSld>
-  <p:clrMapOvr>
-    <a:masterClrMapping/>
-  </p:clrMapOvr>
-</p:sld>
-</file>
-
-<file path=ppt/slides/slide19.xml><?xml version="1.0" encoding="utf-8"?>
-<p:sld xmlns:a="http://schemas.openxmlformats.org/drawingml/2006/main" xmlns:r="http://schemas.openxmlformats.org/officeDocument/2006/relationships" xmlns:p="http://schemas.openxmlformats.org/presentationml/2006/main">
-  <p:cSld name="Slide 19">
-    <p:spTree>
-      <p:nvGrpSpPr>
-        <p:cNvPr id="1" name=""/>
-        <p:cNvGrpSpPr/>
-        <p:nvPr/>
-      </p:nvGrpSpPr>
-      <p:grpSpPr>
-        <a:xfrm>
-          <a:off x="0" y="0"/>
-          <a:ext cx="0" cy="0"/>
-          <a:chOff x="0" y="0"/>
-          <a:chExt cx="0" cy="0"/>
-        </a:xfrm>
-      </p:grpSpPr>
-      <p:sp>
-        <p:nvSpPr>
-          <p:cNvPr id="2" name="Text 0"/>
-          <p:cNvSpPr/>
-          <p:nvPr/>
-        </p:nvSpPr>
-        <p:spPr>
-          <a:xfrm>
-            <a:off x="0" y="457200"/>
-            <a:ext cx="9144000" cy="914400"/>
-          </a:xfrm>
-          <a:prstGeom prst="rect">
-            <a:avLst/>
-          </a:prstGeom>
-          <a:noFill/>
-          <a:ln/>
-        </p:spPr>
-        <p:txBody>
-          <a:bodyPr wrap="square" rtlCol="0" anchor="ctr"/>
-          <a:lstStyle/>
-          <a:p>
-            <a:pPr algn="ctr" indent="0" marL="0">
-              <a:buNone/>
-            </a:pPr>
-            <a:r>
-              <a:rPr lang="en-US" sz="3200" b="1" dirty="0">
-                <a:solidFill>
-                  <a:srgbClr val="366092"/>
-                </a:solidFill>
-              </a:rPr>
-              <a:t>联系方式</a:t>
-            </a:r>
-            <a:endParaRPr lang="en-US" sz="3200" dirty="0"/>
-          </a:p>
-        </p:txBody>
-      </p:sp>
-      <p:sp>
-        <p:nvSpPr>
-          <p:cNvPr id="3" name="Text 1"/>
-          <p:cNvSpPr/>
-          <p:nvPr/>
-        </p:nvSpPr>
-        <p:spPr>
-          <a:xfrm>
-            <a:off x="0" y="1828800"/>
-            <a:ext cx="9144000" cy="4572000"/>
-          </a:xfrm>
-          <a:prstGeom prst="rect">
-            <a:avLst/>
-          </a:prstGeom>
-          <a:noFill/>
-          <a:ln/>
-        </p:spPr>
-        <p:txBody>
-          <a:bodyPr wrap="square" rtlCol="0" anchor="ctr"/>
-          <a:lstStyle/>
-          <a:p>
-            <a:pPr algn="ctr" indent="0" marL="0">
-              <a:lnSpc>
-                <a:spcPts val="150"/>
-              </a:lnSpc>
-              <a:buNone/>
-            </a:pPr>
-            <a:r>
-              <a:rPr lang="en-US" sz="1800" dirty="0">
-                <a:solidFill>
-                  <a:srgbClr val="000000"/>
-                </a:solidFill>
-              </a:rPr>
-              <a:t>如有问题或建议，请联系项目维护者。
-</a:t>
-            </a:r>
-            <a:pPr algn="ctr" indent="0" marL="0">
-              <a:lnSpc>
-                <a:spcPts val="150"/>
-              </a:lnSpc>
-              <a:buNone/>
-            </a:pPr>
-            <a:r>
-              <a:rPr lang="en-US" sz="1800" dirty="0">
-                <a:solidFill>
-                  <a:srgbClr val="000000"/>
-                </a:solidFill>
-              </a:rPr>
-              <a:t>项目版本：1.0.0
-</a:t>
-            </a:r>
-            <a:pPr algn="ctr" indent="0" marL="0">
-              <a:lnSpc>
-                <a:spcPts val="150"/>
-              </a:lnSpc>
-              <a:buNone/>
-            </a:pPr>
-            <a:r>
-              <a:rPr lang="en-US" sz="1800" dirty="0">
-                <a:solidFill>
-                  <a:srgbClr val="000000"/>
-                </a:solidFill>
-              </a:rPr>
-              <a:t>最后更新：2026-04-13
-</a:t>
-            </a:r>
-            <a:pPr algn="ctr" indent="0" marL="0">
-              <a:lnSpc>
-                <a:spcPts val="150"/>
-              </a:lnSpc>
-              <a:buNone/>
-            </a:pPr>
-            <a:r>
-              <a:rPr lang="en-US" sz="1800" dirty="0">
-                <a:solidFill>
-                  <a:srgbClr val="000000"/>
-                </a:solidFill>
-              </a:rPr>
-              <a:t>感谢您的关注！</a:t>
-            </a:r>
-            <a:endParaRPr lang="en-US" sz="1800" dirty="0"/>
+            <a:endParaRPr lang="en-US" sz="1600" dirty="0"/>
           </a:p>
         </p:txBody>
       </p:sp>
@@ -5816,8 +5385,8 @@
         </p:nvSpPr>
         <p:spPr>
           <a:xfrm>
-            <a:off x="0" y="457200"/>
-            <a:ext cx="9144000" cy="914400"/>
+            <a:off x="457200" y="457200"/>
+            <a:ext cx="8229600" cy="914400"/>
           </a:xfrm>
           <a:prstGeom prst="rect">
             <a:avLst/>
@@ -5833,14 +5402,14 @@
               <a:buNone/>
             </a:pPr>
             <a:r>
-              <a:rPr lang="en-US" sz="3200" b="1" dirty="0">
+              <a:rPr lang="en-US" sz="2800" b="1" dirty="0">
                 <a:solidFill>
                   <a:srgbClr val="366092"/>
                 </a:solidFill>
               </a:rPr>
               <a:t>项目概述</a:t>
             </a:r>
-            <a:endParaRPr lang="en-US" sz="3200" dirty="0"/>
+            <a:endParaRPr lang="en-US" sz="2800" dirty="0"/>
           </a:p>
         </p:txBody>
       </p:sp>
@@ -5852,8 +5421,8 @@
         </p:nvSpPr>
         <p:spPr>
           <a:xfrm>
-            <a:off x="914400" y="1828800"/>
-            <a:ext cx="7315200" cy="4572000"/>
+            <a:off x="914400" y="1645920"/>
+            <a:ext cx="7315200" cy="3657600"/>
           </a:xfrm>
           <a:prstGeom prst="rect">
             <a:avLst/>
@@ -5867,12 +5436,12 @@
           <a:p>
             <a:pPr indent="0" marL="0">
               <a:lnSpc>
-                <a:spcPts val="120"/>
+                <a:spcPts val="130"/>
               </a:lnSpc>
               <a:buNone/>
             </a:pPr>
             <a:r>
-              <a:rPr lang="en-US" sz="1800" dirty="0">
+              <a:rPr lang="en-US" sz="1600" dirty="0">
                 <a:solidFill>
                   <a:srgbClr val="000000"/>
                 </a:solidFill>
@@ -5882,12 +5451,12 @@
             </a:r>
             <a:pPr indent="0" marL="0">
               <a:lnSpc>
-                <a:spcPts val="120"/>
+                <a:spcPts val="130"/>
               </a:lnSpc>
               <a:buNone/>
             </a:pPr>
             <a:r>
-              <a:rPr lang="en-US" sz="1800" dirty="0">
+              <a:rPr lang="en-US" sz="1600" dirty="0">
                 <a:solidFill>
                   <a:srgbClr val="000000"/>
                 </a:solidFill>
@@ -5897,12 +5466,12 @@
             </a:r>
             <a:pPr indent="0" marL="0">
               <a:lnSpc>
-                <a:spcPts val="120"/>
+                <a:spcPts val="130"/>
               </a:lnSpc>
               <a:buNone/>
             </a:pPr>
             <a:r>
-              <a:rPr lang="en-US" sz="1800" dirty="0">
+              <a:rPr lang="en-US" sz="1600" dirty="0">
                 <a:solidFill>
                   <a:srgbClr val="000000"/>
                 </a:solidFill>
@@ -5912,12 +5481,12 @@
             </a:r>
             <a:pPr indent="0" marL="0">
               <a:lnSpc>
-                <a:spcPts val="120"/>
+                <a:spcPts val="130"/>
               </a:lnSpc>
               <a:buNone/>
             </a:pPr>
             <a:r>
-              <a:rPr lang="en-US" sz="1800" dirty="0">
+              <a:rPr lang="en-US" sz="1600" dirty="0">
                 <a:solidFill>
                   <a:srgbClr val="000000"/>
                 </a:solidFill>
@@ -5927,12 +5496,12 @@
             </a:r>
             <a:pPr indent="0" marL="0">
               <a:lnSpc>
-                <a:spcPts val="120"/>
+                <a:spcPts val="130"/>
               </a:lnSpc>
               <a:buNone/>
             </a:pPr>
             <a:r>
-              <a:rPr lang="en-US" sz="1800" dirty="0">
+              <a:rPr lang="en-US" sz="1600" dirty="0">
                 <a:solidFill>
                   <a:srgbClr val="000000"/>
                 </a:solidFill>
@@ -5942,12 +5511,12 @@
             </a:r>
             <a:pPr indent="0" marL="0">
               <a:lnSpc>
-                <a:spcPts val="120"/>
+                <a:spcPts val="130"/>
               </a:lnSpc>
               <a:buNone/>
             </a:pPr>
             <a:r>
-              <a:rPr lang="en-US" sz="1800" dirty="0">
+              <a:rPr lang="en-US" sz="1600" dirty="0">
                 <a:solidFill>
                   <a:srgbClr val="000000"/>
                 </a:solidFill>
@@ -5957,12 +5526,12 @@
             </a:r>
             <a:pPr indent="0" marL="0">
               <a:lnSpc>
-                <a:spcPts val="120"/>
+                <a:spcPts val="130"/>
               </a:lnSpc>
               <a:buNone/>
             </a:pPr>
             <a:r>
-              <a:rPr lang="en-US" sz="1800" dirty="0">
+              <a:rPr lang="en-US" sz="1600" dirty="0">
                 <a:solidFill>
                   <a:srgbClr val="000000"/>
                 </a:solidFill>
@@ -5972,28 +5541,28 @@
             </a:r>
             <a:pPr indent="0" marL="0">
               <a:lnSpc>
-                <a:spcPts val="120"/>
+                <a:spcPts val="130"/>
               </a:lnSpc>
               <a:buNone/>
             </a:pPr>
-            <a:endParaRPr lang="en-US" sz="1800" dirty="0"/>
+            <a:endParaRPr lang="en-US" sz="1600" dirty="0"/>
           </a:p>
           <a:p>
             <a:pPr indent="0" marL="0">
               <a:lnSpc>
-                <a:spcPts val="120"/>
+                <a:spcPts val="130"/>
               </a:lnSpc>
               <a:buNone/>
             </a:pPr>
             <a:r>
-              <a:rPr lang="en-US" sz="1800" dirty="0">
+              <a:rPr lang="en-US" sz="1600" dirty="0">
                 <a:solidFill>
                   <a:srgbClr val="000000"/>
                 </a:solidFill>
               </a:rPr>
               <a:t>系统旨在帮助用户更好地管理和跟踪任务，提高工作效率。</a:t>
             </a:r>
-            <a:endParaRPr lang="en-US" sz="1800" dirty="0"/>
+            <a:endParaRPr lang="en-US" sz="1600" dirty="0"/>
           </a:p>
         </p:txBody>
       </p:sp>
@@ -6030,8 +5599,8 @@
         </p:nvSpPr>
         <p:spPr>
           <a:xfrm>
-            <a:off x="0" y="457200"/>
-            <a:ext cx="9144000" cy="914400"/>
+            <a:off x="457200" y="457200"/>
+            <a:ext cx="8229600" cy="914400"/>
           </a:xfrm>
           <a:prstGeom prst="rect">
             <a:avLst/>
@@ -6047,14 +5616,14 @@
               <a:buNone/>
             </a:pPr>
             <a:r>
-              <a:rPr lang="en-US" sz="3200" b="1" dirty="0">
+              <a:rPr lang="en-US" sz="2800" b="1" dirty="0">
                 <a:solidFill>
                   <a:srgbClr val="366092"/>
                 </a:solidFill>
               </a:rPr>
               <a:t>技术栈</a:t>
             </a:r>
-            <a:endParaRPr lang="en-US" sz="3200" dirty="0"/>
+            <a:endParaRPr lang="en-US" sz="2800" dirty="0"/>
           </a:p>
         </p:txBody>
       </p:sp>
@@ -6066,31 +5635,31 @@
         </p:nvSpPr>
         <p:spPr>
           <a:xfrm>
-            <a:off x="914400" y="1828800"/>
-            <a:ext cx="3657600" cy="731520"/>
-          </a:xfrm>
-          <a:prstGeom prst="rect">
-            <a:avLst/>
-          </a:prstGeom>
-          <a:noFill/>
-          <a:ln/>
-        </p:spPr>
-        <p:txBody>
-          <a:bodyPr wrap="square" rtlCol="0" anchor="ctr"/>
-          <a:lstStyle/>
-          <a:p>
-            <a:pPr indent="0" marL="0">
-              <a:buNone/>
-            </a:pPr>
-            <a:r>
-              <a:rPr lang="en-US" sz="2200" b="1" dirty="0">
+            <a:off x="457200" y="1645920"/>
+            <a:ext cx="3657600" cy="548640"/>
+          </a:xfrm>
+          <a:prstGeom prst="rect">
+            <a:avLst/>
+          </a:prstGeom>
+          <a:noFill/>
+          <a:ln/>
+        </p:spPr>
+        <p:txBody>
+          <a:bodyPr wrap="square" rtlCol="0" anchor="ctr"/>
+          <a:lstStyle/>
+          <a:p>
+            <a:pPr indent="0" marL="0">
+              <a:buNone/>
+            </a:pPr>
+            <a:r>
+              <a:rPr lang="en-US" sz="2000" b="1" dirty="0">
                 <a:solidFill>
                   <a:srgbClr val="548DD4"/>
                 </a:solidFill>
               </a:rPr>
               <a:t>前端</a:t>
             </a:r>
-            <a:endParaRPr lang="en-US" sz="2200" dirty="0"/>
+            <a:endParaRPr lang="en-US" sz="2000" dirty="0"/>
           </a:p>
         </p:txBody>
       </p:sp>
@@ -6102,7 +5671,7 @@
         </p:nvSpPr>
         <p:spPr>
           <a:xfrm>
-            <a:off x="1371600" y="2743200"/>
+            <a:off x="914400" y="2286000"/>
             <a:ext cx="3657600" cy="2743200"/>
           </a:xfrm>
           <a:prstGeom prst="rect">
@@ -6119,7 +5688,7 @@
               <a:buNone/>
             </a:pPr>
             <a:r>
-              <a:rPr lang="en-US" sz="1600" dirty="0">
+              <a:rPr lang="en-US" sz="1400" dirty="0">
                 <a:solidFill>
                   <a:srgbClr val="000000"/>
                 </a:solidFill>
@@ -6131,7 +5700,7 @@
               <a:buNone/>
             </a:pPr>
             <a:r>
-              <a:rPr lang="en-US" sz="1600" dirty="0">
+              <a:rPr lang="en-US" sz="1400" dirty="0">
                 <a:solidFill>
                   <a:srgbClr val="000000"/>
                 </a:solidFill>
@@ -6143,7 +5712,7 @@
               <a:buNone/>
             </a:pPr>
             <a:r>
-              <a:rPr lang="en-US" sz="1600" dirty="0">
+              <a:rPr lang="en-US" sz="1400" dirty="0">
                 <a:solidFill>
                   <a:srgbClr val="000000"/>
                 </a:solidFill>
@@ -6155,7 +5724,7 @@
               <a:buNone/>
             </a:pPr>
             <a:r>
-              <a:rPr lang="en-US" sz="1600" dirty="0">
+              <a:rPr lang="en-US" sz="1400" dirty="0">
                 <a:solidFill>
                   <a:srgbClr val="000000"/>
                 </a:solidFill>
@@ -6163,7 +5732,7 @@
               <a:t>• WebSocket（实时提醒）
 </a:t>
             </a:r>
-            <a:endParaRPr lang="en-US" sz="1600" dirty="0"/>
+            <a:endParaRPr lang="en-US" sz="1400" dirty="0"/>
           </a:p>
         </p:txBody>
       </p:sp>
@@ -6175,31 +5744,31 @@
         </p:nvSpPr>
         <p:spPr>
           <a:xfrm>
-            <a:off x="5486400" y="1828800"/>
-            <a:ext cx="3657600" cy="731520"/>
-          </a:xfrm>
-          <a:prstGeom prst="rect">
-            <a:avLst/>
-          </a:prstGeom>
-          <a:noFill/>
-          <a:ln/>
-        </p:spPr>
-        <p:txBody>
-          <a:bodyPr wrap="square" rtlCol="0" anchor="ctr"/>
-          <a:lstStyle/>
-          <a:p>
-            <a:pPr indent="0" marL="0">
-              <a:buNone/>
-            </a:pPr>
-            <a:r>
-              <a:rPr lang="en-US" sz="2200" b="1" dirty="0">
+            <a:off x="5029200" y="1645920"/>
+            <a:ext cx="3657600" cy="548640"/>
+          </a:xfrm>
+          <a:prstGeom prst="rect">
+            <a:avLst/>
+          </a:prstGeom>
+          <a:noFill/>
+          <a:ln/>
+        </p:spPr>
+        <p:txBody>
+          <a:bodyPr wrap="square" rtlCol="0" anchor="ctr"/>
+          <a:lstStyle/>
+          <a:p>
+            <a:pPr indent="0" marL="0">
+              <a:buNone/>
+            </a:pPr>
+            <a:r>
+              <a:rPr lang="en-US" sz="2000" b="1" dirty="0">
                 <a:solidFill>
                   <a:srgbClr val="548DD4"/>
                 </a:solidFill>
               </a:rPr>
               <a:t>后端</a:t>
             </a:r>
-            <a:endParaRPr lang="en-US" sz="2200" dirty="0"/>
+            <a:endParaRPr lang="en-US" sz="2000" dirty="0"/>
           </a:p>
         </p:txBody>
       </p:sp>
@@ -6211,7 +5780,7 @@
         </p:nvSpPr>
         <p:spPr>
           <a:xfrm>
-            <a:off x="5943600" y="2743200"/>
+            <a:off x="5486400" y="2286000"/>
             <a:ext cx="3657600" cy="2743200"/>
           </a:xfrm>
           <a:prstGeom prst="rect">
@@ -6228,7 +5797,7 @@
               <a:buNone/>
             </a:pPr>
             <a:r>
-              <a:rPr lang="en-US" sz="1600" dirty="0">
+              <a:rPr lang="en-US" sz="1400" dirty="0">
                 <a:solidFill>
                   <a:srgbClr val="000000"/>
                 </a:solidFill>
@@ -6240,7 +5809,7 @@
               <a:buNone/>
             </a:pPr>
             <a:r>
-              <a:rPr lang="en-US" sz="1600" dirty="0">
+              <a:rPr lang="en-US" sz="1400" dirty="0">
                 <a:solidFill>
                   <a:srgbClr val="000000"/>
                 </a:solidFill>
@@ -6252,7 +5821,7 @@
               <a:buNone/>
             </a:pPr>
             <a:r>
-              <a:rPr lang="en-US" sz="1600" dirty="0">
+              <a:rPr lang="en-US" sz="1400" dirty="0">
                 <a:solidFill>
                   <a:srgbClr val="000000"/>
                 </a:solidFill>
@@ -6264,7 +5833,7 @@
               <a:buNone/>
             </a:pPr>
             <a:r>
-              <a:rPr lang="en-US" sz="1600" dirty="0">
+              <a:rPr lang="en-US" sz="1400" dirty="0">
                 <a:solidFill>
                   <a:srgbClr val="000000"/>
                 </a:solidFill>
@@ -6276,7 +5845,7 @@
               <a:buNone/>
             </a:pPr>
             <a:r>
-              <a:rPr lang="en-US" sz="1600" dirty="0">
+              <a:rPr lang="en-US" sz="1400" dirty="0">
                 <a:solidFill>
                   <a:srgbClr val="000000"/>
                 </a:solidFill>
@@ -6288,7 +5857,7 @@
               <a:buNone/>
             </a:pPr>
             <a:r>
-              <a:rPr lang="en-US" sz="1600" dirty="0">
+              <a:rPr lang="en-US" sz="1400" dirty="0">
                 <a:solidFill>
                   <a:srgbClr val="000000"/>
                 </a:solidFill>
@@ -6296,7 +5865,7 @@
               <a:t>• JWT（认证）
 </a:t>
             </a:r>
-            <a:endParaRPr lang="en-US" sz="1600" dirty="0"/>
+            <a:endParaRPr lang="en-US" sz="1400" dirty="0"/>
           </a:p>
         </p:txBody>
       </p:sp>
@@ -6333,8 +5902,8 @@
         </p:nvSpPr>
         <p:spPr>
           <a:xfrm>
-            <a:off x="0" y="457200"/>
-            <a:ext cx="9144000" cy="914400"/>
+            <a:off x="457200" y="457200"/>
+            <a:ext cx="8229600" cy="914400"/>
           </a:xfrm>
           <a:prstGeom prst="rect">
             <a:avLst/>
@@ -6350,14 +5919,14 @@
               <a:buNone/>
             </a:pPr>
             <a:r>
-              <a:rPr lang="en-US" sz="3200" b="1" dirty="0">
+              <a:rPr lang="en-US" sz="2800" b="1" dirty="0">
                 <a:solidFill>
                   <a:srgbClr val="366092"/>
                 </a:solidFill>
               </a:rPr>
               <a:t>项目结构</a:t>
             </a:r>
-            <a:endParaRPr lang="en-US" sz="3200" dirty="0"/>
+            <a:endParaRPr lang="en-US" sz="2800" dirty="0"/>
           </a:p>
         </p:txBody>
       </p:sp>
@@ -6369,8 +5938,8 @@
         </p:nvSpPr>
         <p:spPr>
           <a:xfrm>
-            <a:off x="914400" y="1828800"/>
-            <a:ext cx="8229600" cy="4572000"/>
+            <a:off x="914400" y="1645920"/>
+            <a:ext cx="7315200" cy="3657600"/>
           </a:xfrm>
           <a:prstGeom prst="rect">
             <a:avLst/>
@@ -6389,7 +5958,7 @@
               <a:buNone/>
             </a:pPr>
             <a:r>
-              <a:rPr lang="en-US" sz="1400" dirty="0">
+              <a:rPr lang="en-US" sz="1300" dirty="0">
                 <a:solidFill>
                   <a:srgbClr val="000000"/>
                 </a:solidFill>
@@ -6404,7 +5973,7 @@
               <a:buNone/>
             </a:pPr>
             <a:r>
-              <a:rPr lang="en-US" sz="1400" dirty="0">
+              <a:rPr lang="en-US" sz="1300" dirty="0">
                 <a:solidFill>
                   <a:srgbClr val="000000"/>
                 </a:solidFill>
@@ -6419,7 +5988,7 @@
               <a:buNone/>
             </a:pPr>
             <a:r>
-              <a:rPr lang="en-US" sz="1400" dirty="0">
+              <a:rPr lang="en-US" sz="1300" dirty="0">
                 <a:solidFill>
                   <a:srgbClr val="000000"/>
                 </a:solidFill>
@@ -6434,7 +6003,7 @@
               <a:buNone/>
             </a:pPr>
             <a:r>
-              <a:rPr lang="en-US" sz="1400" dirty="0">
+              <a:rPr lang="en-US" sz="1300" dirty="0">
                 <a:solidFill>
                   <a:srgbClr val="000000"/>
                 </a:solidFill>
@@ -6449,7 +6018,7 @@
               <a:buNone/>
             </a:pPr>
             <a:r>
-              <a:rPr lang="en-US" sz="1400" dirty="0">
+              <a:rPr lang="en-US" sz="1300" dirty="0">
                 <a:solidFill>
                   <a:srgbClr val="000000"/>
                 </a:solidFill>
@@ -6464,7 +6033,7 @@
               <a:buNone/>
             </a:pPr>
             <a:r>
-              <a:rPr lang="en-US" sz="1400" dirty="0">
+              <a:rPr lang="en-US" sz="1300" dirty="0">
                 <a:solidFill>
                   <a:srgbClr val="000000"/>
                 </a:solidFill>
@@ -6479,7 +6048,7 @@
               <a:buNone/>
             </a:pPr>
             <a:r>
-              <a:rPr lang="en-US" sz="1400" dirty="0">
+              <a:rPr lang="en-US" sz="1300" dirty="0">
                 <a:solidFill>
                   <a:srgbClr val="000000"/>
                 </a:solidFill>
@@ -6494,12 +6063,12 @@
               <a:buNone/>
             </a:pPr>
             <a:r>
-              <a:rPr lang="en-US" sz="1400" dirty="0">
-                <a:solidFill>
-                  <a:srgbClr val="000000"/>
-                </a:solidFill>
-              </a:rPr>
-              <a:t>├── generate_er_diagram.py  # 生成ER关系图
+              <a:rPr lang="en-US" sz="1300" dirty="0">
+                <a:solidFill>
+                  <a:srgbClr val="000000"/>
+                </a:solidFill>
+              </a:rPr>
+              <a:t>├── manage.py             # 项目管理脚本
 </a:t>
             </a:r>
             <a:pPr indent="0" marL="0">
@@ -6509,52 +6078,7 @@
               <a:buNone/>
             </a:pPr>
             <a:r>
-              <a:rPr lang="en-US" sz="1400" dirty="0">
-                <a:solidFill>
-                  <a:srgbClr val="000000"/>
-                </a:solidFill>
-              </a:rPr>
-              <a:t>├── manage.py             # 项目管理脚本
-</a:t>
-            </a:r>
-            <a:pPr indent="0" marL="0">
-              <a:lnSpc>
-                <a:spcPts val="120"/>
-              </a:lnSpc>
-              <a:buNone/>
-            </a:pPr>
-            <a:r>
-              <a:rPr lang="en-US" sz="1400" dirty="0">
-                <a:solidFill>
-                  <a:srgbClr val="000000"/>
-                </a:solidFill>
-              </a:rPr>
-              <a:t>├── my.cnf                # 数据库配置
-</a:t>
-            </a:r>
-            <a:pPr indent="0" marL="0">
-              <a:lnSpc>
-                <a:spcPts val="120"/>
-              </a:lnSpc>
-              <a:buNone/>
-            </a:pPr>
-            <a:r>
-              <a:rPr lang="en-US" sz="1400" dirty="0">
-                <a:solidFill>
-                  <a:srgbClr val="000000"/>
-                </a:solidFill>
-              </a:rPr>
-              <a:t>├── package.json          # npm配置
-</a:t>
-            </a:r>
-            <a:pPr indent="0" marL="0">
-              <a:lnSpc>
-                <a:spcPts val="120"/>
-              </a:lnSpc>
-              <a:buNone/>
-            </a:pPr>
-            <a:r>
-              <a:rPr lang="en-US" sz="1400" dirty="0">
+              <a:rPr lang="en-US" sz="1300" dirty="0">
                 <a:solidFill>
                   <a:srgbClr val="000000"/>
                 </a:solidFill>
@@ -6562,7 +6086,7 @@
               <a:t>└── requirements.txt      # Python依赖
 </a:t>
             </a:r>
-            <a:endParaRPr lang="en-US" sz="1400" dirty="0"/>
+            <a:endParaRPr lang="en-US" sz="1300" dirty="0"/>
           </a:p>
         </p:txBody>
       </p:sp>
@@ -6599,8 +6123,8 @@
         </p:nvSpPr>
         <p:spPr>
           <a:xfrm>
-            <a:off x="0" y="457200"/>
-            <a:ext cx="9144000" cy="914400"/>
+            <a:off x="457200" y="457200"/>
+            <a:ext cx="8229600" cy="914400"/>
           </a:xfrm>
           <a:prstGeom prst="rect">
             <a:avLst/>
@@ -6616,14 +6140,14 @@
               <a:buNone/>
             </a:pPr>
             <a:r>
-              <a:rPr lang="en-US" sz="3200" b="1" dirty="0">
+              <a:rPr lang="en-US" sz="2800" b="1" dirty="0">
                 <a:solidFill>
                   <a:srgbClr val="366092"/>
                 </a:solidFill>
               </a:rPr>
-              <a:t>核心功能</a:t>
-            </a:r>
-            <a:endParaRPr lang="en-US" sz="3200" dirty="0"/>
+              <a:t>核心功能 - 用户管理</a:t>
+            </a:r>
+            <a:endParaRPr lang="en-US" sz="2800" dirty="0"/>
           </a:p>
         </p:txBody>
       </p:sp>
@@ -6636,43 +6160,7 @@
         <p:spPr>
           <a:xfrm>
             <a:off x="914400" y="1645920"/>
-            <a:ext cx="8229600" cy="731520"/>
-          </a:xfrm>
-          <a:prstGeom prst="rect">
-            <a:avLst/>
-          </a:prstGeom>
-          <a:noFill/>
-          <a:ln/>
-        </p:spPr>
-        <p:txBody>
-          <a:bodyPr wrap="square" rtlCol="0" anchor="ctr"/>
-          <a:lstStyle/>
-          <a:p>
-            <a:pPr indent="0" marL="0">
-              <a:buNone/>
-            </a:pPr>
-            <a:r>
-              <a:rPr lang="en-US" sz="2400" b="1" dirty="0">
-                <a:solidFill>
-                  <a:srgbClr val="548DD4"/>
-                </a:solidFill>
-              </a:rPr>
-              <a:t>1. 用户管理</a:t>
-            </a:r>
-            <a:endParaRPr lang="en-US" sz="2400" dirty="0"/>
-          </a:p>
-        </p:txBody>
-      </p:sp>
-      <p:sp>
-        <p:nvSpPr>
-          <p:cNvPr id="4" name="Text 2"/>
-          <p:cNvSpPr/>
-          <p:nvPr/>
-        </p:nvSpPr>
-        <p:spPr>
-          <a:xfrm>
-            <a:off x="1371600" y="2560320"/>
-            <a:ext cx="3657600" cy="2743200"/>
+            <a:ext cx="7315200" cy="3657600"/>
           </a:xfrm>
           <a:prstGeom prst="rect">
             <a:avLst/>
@@ -6769,8 +6257,8 @@
         </p:nvSpPr>
         <p:spPr>
           <a:xfrm>
-            <a:off x="0" y="457200"/>
-            <a:ext cx="9144000" cy="914400"/>
+            <a:off x="457200" y="457200"/>
+            <a:ext cx="8229600" cy="914400"/>
           </a:xfrm>
           <a:prstGeom prst="rect">
             <a:avLst/>
@@ -6786,14 +6274,14 @@
               <a:buNone/>
             </a:pPr>
             <a:r>
-              <a:rPr lang="en-US" sz="3200" b="1" dirty="0">
+              <a:rPr lang="en-US" sz="2800" b="1" dirty="0">
                 <a:solidFill>
                   <a:srgbClr val="366092"/>
                 </a:solidFill>
               </a:rPr>
-              <a:t>核心功能</a:t>
-            </a:r>
-            <a:endParaRPr lang="en-US" sz="3200" dirty="0"/>
+              <a:t>核心功能 - 任务管理</a:t>
+            </a:r>
+            <a:endParaRPr lang="en-US" sz="2800" dirty="0"/>
           </a:p>
         </p:txBody>
       </p:sp>
@@ -6806,43 +6294,7 @@
         <p:spPr>
           <a:xfrm>
             <a:off x="914400" y="1645920"/>
-            <a:ext cx="8229600" cy="731520"/>
-          </a:xfrm>
-          <a:prstGeom prst="rect">
-            <a:avLst/>
-          </a:prstGeom>
-          <a:noFill/>
-          <a:ln/>
-        </p:spPr>
-        <p:txBody>
-          <a:bodyPr wrap="square" rtlCol="0" anchor="ctr"/>
-          <a:lstStyle/>
-          <a:p>
-            <a:pPr indent="0" marL="0">
-              <a:buNone/>
-            </a:pPr>
-            <a:r>
-              <a:rPr lang="en-US" sz="2400" b="1" dirty="0">
-                <a:solidFill>
-                  <a:srgbClr val="548DD4"/>
-                </a:solidFill>
-              </a:rPr>
-              <a:t>2. 任务管理</a:t>
-            </a:r>
-            <a:endParaRPr lang="en-US" sz="2400" dirty="0"/>
-          </a:p>
-        </p:txBody>
-      </p:sp>
-      <p:sp>
-        <p:nvSpPr>
-          <p:cNvPr id="4" name="Text 2"/>
-          <p:cNvSpPr/>
-          <p:nvPr/>
-        </p:nvSpPr>
-        <p:spPr>
-          <a:xfrm>
-            <a:off x="1371600" y="2560320"/>
-            <a:ext cx="8229600" cy="3657600"/>
+            <a:ext cx="7315200" cy="3657600"/>
           </a:xfrm>
           <a:prstGeom prst="rect">
             <a:avLst/>
@@ -6951,8 +6403,8 @@
         </p:nvSpPr>
         <p:spPr>
           <a:xfrm>
-            <a:off x="0" y="457200"/>
-            <a:ext cx="9144000" cy="914400"/>
+            <a:off x="457200" y="457200"/>
+            <a:ext cx="8229600" cy="914400"/>
           </a:xfrm>
           <a:prstGeom prst="rect">
             <a:avLst/>
@@ -6968,14 +6420,14 @@
               <a:buNone/>
             </a:pPr>
             <a:r>
-              <a:rPr lang="en-US" sz="3200" b="1" dirty="0">
+              <a:rPr lang="en-US" sz="2800" b="1" dirty="0">
                 <a:solidFill>
                   <a:srgbClr val="366092"/>
                 </a:solidFill>
               </a:rPr>
-              <a:t>核心功能</a:t>
-            </a:r>
-            <a:endParaRPr lang="en-US" sz="3200" dirty="0"/>
+              <a:t>核心功能 - 提醒系统</a:t>
+            </a:r>
+            <a:endParaRPr lang="en-US" sz="2800" dirty="0"/>
           </a:p>
         </p:txBody>
       </p:sp>
@@ -6988,43 +6440,7 @@
         <p:spPr>
           <a:xfrm>
             <a:off x="914400" y="1645920"/>
-            <a:ext cx="8229600" cy="731520"/>
-          </a:xfrm>
-          <a:prstGeom prst="rect">
-            <a:avLst/>
-          </a:prstGeom>
-          <a:noFill/>
-          <a:ln/>
-        </p:spPr>
-        <p:txBody>
-          <a:bodyPr wrap="square" rtlCol="0" anchor="ctr"/>
-          <a:lstStyle/>
-          <a:p>
-            <a:pPr indent="0" marL="0">
-              <a:buNone/>
-            </a:pPr>
-            <a:r>
-              <a:rPr lang="en-US" sz="2400" b="1" dirty="0">
-                <a:solidFill>
-                  <a:srgbClr val="548DD4"/>
-                </a:solidFill>
-              </a:rPr>
-              <a:t>3. 提醒系统</a:t>
-            </a:r>
-            <a:endParaRPr lang="en-US" sz="2400" dirty="0"/>
-          </a:p>
-        </p:txBody>
-      </p:sp>
-      <p:sp>
-        <p:nvSpPr>
-          <p:cNvPr id="4" name="Text 2"/>
-          <p:cNvSpPr/>
-          <p:nvPr/>
-        </p:nvSpPr>
-        <p:spPr>
-          <a:xfrm>
-            <a:off x="1371600" y="2560320"/>
-            <a:ext cx="8229600" cy="3657600"/>
+            <a:ext cx="7315200" cy="3657600"/>
           </a:xfrm>
           <a:prstGeom prst="rect">
             <a:avLst/>
@@ -7121,8 +6537,8 @@
         </p:nvSpPr>
         <p:spPr>
           <a:xfrm>
-            <a:off x="0" y="457200"/>
-            <a:ext cx="9144000" cy="914400"/>
+            <a:off x="457200" y="457200"/>
+            <a:ext cx="8229600" cy="914400"/>
           </a:xfrm>
           <a:prstGeom prst="rect">
             <a:avLst/>
@@ -7138,14 +6554,14 @@
               <a:buNone/>
             </a:pPr>
             <a:r>
-              <a:rPr lang="en-US" sz="3200" b="1" dirty="0">
+              <a:rPr lang="en-US" sz="2800" b="1" dirty="0">
                 <a:solidFill>
                   <a:srgbClr val="366092"/>
                 </a:solidFill>
               </a:rPr>
-              <a:t>核心功能</a:t>
-            </a:r>
-            <a:endParaRPr lang="en-US" sz="3200" dirty="0"/>
+              <a:t>核心功能 - 统计分析 &amp; 数据导出</a:t>
+            </a:r>
+            <a:endParaRPr lang="en-US" sz="2800" dirty="0"/>
           </a:p>
         </p:txBody>
       </p:sp>
@@ -7157,31 +6573,31 @@
         </p:nvSpPr>
         <p:spPr>
           <a:xfrm>
-            <a:off x="914400" y="1645920"/>
-            <a:ext cx="8229600" cy="731520"/>
-          </a:xfrm>
-          <a:prstGeom prst="rect">
-            <a:avLst/>
-          </a:prstGeom>
-          <a:noFill/>
-          <a:ln/>
-        </p:spPr>
-        <p:txBody>
-          <a:bodyPr wrap="square" rtlCol="0" anchor="ctr"/>
-          <a:lstStyle/>
-          <a:p>
-            <a:pPr indent="0" marL="0">
-              <a:buNone/>
-            </a:pPr>
-            <a:r>
-              <a:rPr lang="en-US" sz="2400" b="1" dirty="0">
-                <a:solidFill>
-                  <a:srgbClr val="548DD4"/>
-                </a:solidFill>
-              </a:rPr>
-              <a:t>4. 统计分析 &amp; 数据导出</a:t>
-            </a:r>
-            <a:endParaRPr lang="en-US" sz="2400" dirty="0"/>
+            <a:off x="457200" y="1645920"/>
+            <a:ext cx="3657600" cy="548640"/>
+          </a:xfrm>
+          <a:prstGeom prst="rect">
+            <a:avLst/>
+          </a:prstGeom>
+          <a:noFill/>
+          <a:ln/>
+        </p:spPr>
+        <p:txBody>
+          <a:bodyPr wrap="square" rtlCol="0" anchor="ctr"/>
+          <a:lstStyle/>
+          <a:p>
+            <a:pPr indent="0" marL="0">
+              <a:buNone/>
+            </a:pPr>
+            <a:r>
+              <a:rPr lang="en-US" sz="1800" b="1" dirty="0">
+                <a:solidFill>
+                  <a:srgbClr val="000000"/>
+                </a:solidFill>
+              </a:rPr>
+              <a:t>统计分析</a:t>
+            </a:r>
+            <a:endParaRPr lang="en-US" sz="1800" dirty="0"/>
           </a:p>
         </p:txBody>
       </p:sp>
@@ -7193,7 +6609,116 @@
         </p:nvSpPr>
         <p:spPr>
           <a:xfrm>
-            <a:off x="914400" y="2560320"/>
+            <a:off x="914400" y="2286000"/>
+            <a:ext cx="3657600" cy="3657600"/>
+          </a:xfrm>
+          <a:prstGeom prst="rect">
+            <a:avLst/>
+          </a:prstGeom>
+          <a:noFill/>
+          <a:ln/>
+        </p:spPr>
+        <p:txBody>
+          <a:bodyPr wrap="square" rtlCol="0" anchor="ctr"/>
+          <a:lstStyle/>
+          <a:p>
+            <a:pPr indent="0" marL="0">
+              <a:buNone/>
+            </a:pPr>
+            <a:r>
+              <a:rPr lang="en-US" sz="1400" dirty="0">
+                <a:solidFill>
+                  <a:srgbClr val="000000"/>
+                </a:solidFill>
+              </a:rPr>
+              <a:t>• 任务完成率
+</a:t>
+            </a:r>
+            <a:pPr indent="0" marL="0">
+              <a:buNone/>
+            </a:pPr>
+            <a:r>
+              <a:rPr lang="en-US" sz="1400" dirty="0">
+                <a:solidFill>
+                  <a:srgbClr val="000000"/>
+                </a:solidFill>
+              </a:rPr>
+              <a:t>• 任务状态分布
+</a:t>
+            </a:r>
+            <a:pPr indent="0" marL="0">
+              <a:buNone/>
+            </a:pPr>
+            <a:r>
+              <a:rPr lang="en-US" sz="1400" dirty="0">
+                <a:solidFill>
+                  <a:srgbClr val="000000"/>
+                </a:solidFill>
+              </a:rPr>
+              <a:t>• 任务优先级分布
+</a:t>
+            </a:r>
+            <a:pPr indent="0" marL="0">
+              <a:buNone/>
+            </a:pPr>
+            <a:r>
+              <a:rPr lang="en-US" sz="1400" dirty="0">
+                <a:solidFill>
+                  <a:srgbClr val="000000"/>
+                </a:solidFill>
+              </a:rPr>
+              <a:t>• 任务创建趋势
+</a:t>
+            </a:r>
+            <a:pPr indent="0" marL="0">
+              <a:buNone/>
+            </a:pPr>
+            <a:r>
+              <a:rPr lang="en-US" sz="1400" dirty="0">
+                <a:solidFill>
+                  <a:srgbClr val="000000"/>
+                </a:solidFill>
+              </a:rPr>
+              <a:t>• 标签分布
+</a:t>
+            </a:r>
+            <a:pPr indent="0" marL="0">
+              <a:buNone/>
+            </a:pPr>
+            <a:r>
+              <a:rPr lang="en-US" sz="1400" dirty="0">
+                <a:solidFill>
+                  <a:srgbClr val="000000"/>
+                </a:solidFill>
+              </a:rPr>
+              <a:t>• 每日任务完成数
+</a:t>
+            </a:r>
+            <a:pPr indent="0" marL="0">
+              <a:buNone/>
+            </a:pPr>
+            <a:r>
+              <a:rPr lang="en-US" sz="1400" dirty="0">
+                <a:solidFill>
+                  <a:srgbClr val="000000"/>
+                </a:solidFill>
+              </a:rPr>
+              <a:t>• 管理员统计
+</a:t>
+            </a:r>
+            <a:endParaRPr lang="en-US" sz="1400" dirty="0"/>
+          </a:p>
+        </p:txBody>
+      </p:sp>
+      <p:sp>
+        <p:nvSpPr>
+          <p:cNvPr id="5" name="Text 3"/>
+          <p:cNvSpPr/>
+          <p:nvPr/>
+        </p:nvSpPr>
+        <p:spPr>
+          <a:xfrm>
+            <a:off x="5029200" y="1645920"/>
             <a:ext cx="3657600" cy="548640"/>
           </a:xfrm>
           <a:prstGeom prst="rect">
@@ -7210,123 +6735,14 @@
               <a:buNone/>
             </a:pPr>
             <a:r>
-              <a:rPr lang="en-US" sz="2000" b="1" dirty="0">
-                <a:solidFill>
-                  <a:srgbClr val="000000"/>
-                </a:solidFill>
-              </a:rPr>
-              <a:t>统计分析</a:t>
-            </a:r>
-            <a:endParaRPr lang="en-US" sz="2000" dirty="0"/>
-          </a:p>
-        </p:txBody>
-      </p:sp>
-      <p:sp>
-        <p:nvSpPr>
-          <p:cNvPr id="5" name="Text 3"/>
-          <p:cNvSpPr/>
-          <p:nvPr/>
-        </p:nvSpPr>
-        <p:spPr>
-          <a:xfrm>
-            <a:off x="1371600" y="3108960"/>
-            <a:ext cx="3657600" cy="2743200"/>
-          </a:xfrm>
-          <a:prstGeom prst="rect">
-            <a:avLst/>
-          </a:prstGeom>
-          <a:noFill/>
-          <a:ln/>
-        </p:spPr>
-        <p:txBody>
-          <a:bodyPr wrap="square" rtlCol="0" anchor="ctr"/>
-          <a:lstStyle/>
-          <a:p>
-            <a:pPr indent="0" marL="0">
-              <a:buNone/>
-            </a:pPr>
-            <a:r>
-              <a:rPr lang="en-US" sz="1600" dirty="0">
-                <a:solidFill>
-                  <a:srgbClr val="000000"/>
-                </a:solidFill>
-              </a:rPr>
-              <a:t>• 任务完成率
-</a:t>
-            </a:r>
-            <a:pPr indent="0" marL="0">
-              <a:buNone/>
-            </a:pPr>
-            <a:r>
-              <a:rPr lang="en-US" sz="1600" dirty="0">
-                <a:solidFill>
-                  <a:srgbClr val="000000"/>
-                </a:solidFill>
-              </a:rPr>
-              <a:t>• 任务状态分布
-</a:t>
-            </a:r>
-            <a:pPr indent="0" marL="0">
-              <a:buNone/>
-            </a:pPr>
-            <a:r>
-              <a:rPr lang="en-US" sz="1600" dirty="0">
-                <a:solidFill>
-                  <a:srgbClr val="000000"/>
-                </a:solidFill>
-              </a:rPr>
-              <a:t>• 任务优先级分布
-</a:t>
-            </a:r>
-            <a:pPr indent="0" marL="0">
-              <a:buNone/>
-            </a:pPr>
-            <a:r>
-              <a:rPr lang="en-US" sz="1600" dirty="0">
-                <a:solidFill>
-                  <a:srgbClr val="000000"/>
-                </a:solidFill>
-              </a:rPr>
-              <a:t>• 任务创建趋势
-</a:t>
-            </a:r>
-            <a:pPr indent="0" marL="0">
-              <a:buNone/>
-            </a:pPr>
-            <a:r>
-              <a:rPr lang="en-US" sz="1600" dirty="0">
-                <a:solidFill>
-                  <a:srgbClr val="000000"/>
-                </a:solidFill>
-              </a:rPr>
-              <a:t>• 标签分布
-</a:t>
-            </a:r>
-            <a:pPr indent="0" marL="0">
-              <a:buNone/>
-            </a:pPr>
-            <a:r>
-              <a:rPr lang="en-US" sz="1600" dirty="0">
-                <a:solidFill>
-                  <a:srgbClr val="000000"/>
-                </a:solidFill>
-              </a:rPr>
-              <a:t>• 每日任务完成数
-</a:t>
-            </a:r>
-            <a:pPr indent="0" marL="0">
-              <a:buNone/>
-            </a:pPr>
-            <a:r>
-              <a:rPr lang="en-US" sz="1600" dirty="0">
-                <a:solidFill>
-                  <a:srgbClr val="000000"/>
-                </a:solidFill>
-              </a:rPr>
-              <a:t>• 管理员统计
-</a:t>
-            </a:r>
-            <a:endParaRPr lang="en-US" sz="1600" dirty="0"/>
+              <a:rPr lang="en-US" sz="1800" b="1" dirty="0">
+                <a:solidFill>
+                  <a:srgbClr val="000000"/>
+                </a:solidFill>
+              </a:rPr>
+              <a:t>数据导出</a:t>
+            </a:r>
+            <a:endParaRPr lang="en-US" sz="1800" dirty="0"/>
           </a:p>
         </p:txBody>
       </p:sp>
@@ -7338,60 +6754,24 @@
         </p:nvSpPr>
         <p:spPr>
           <a:xfrm>
-            <a:off x="5486400" y="2560320"/>
-            <a:ext cx="3657600" cy="548640"/>
-          </a:xfrm>
-          <a:prstGeom prst="rect">
-            <a:avLst/>
-          </a:prstGeom>
-          <a:noFill/>
-          <a:ln/>
-        </p:spPr>
-        <p:txBody>
-          <a:bodyPr wrap="square" rtlCol="0" anchor="ctr"/>
-          <a:lstStyle/>
-          <a:p>
-            <a:pPr indent="0" marL="0">
-              <a:buNone/>
-            </a:pPr>
-            <a:r>
-              <a:rPr lang="en-US" sz="2000" b="1" dirty="0">
-                <a:solidFill>
-                  <a:srgbClr val="000000"/>
-                </a:solidFill>
-              </a:rPr>
-              <a:t>数据导出</a:t>
-            </a:r>
-            <a:endParaRPr lang="en-US" sz="2000" dirty="0"/>
-          </a:p>
-        </p:txBody>
-      </p:sp>
-      <p:sp>
-        <p:nvSpPr>
-          <p:cNvPr id="7" name="Text 5"/>
-          <p:cNvSpPr/>
-          <p:nvPr/>
-        </p:nvSpPr>
-        <p:spPr>
-          <a:xfrm>
-            <a:off x="5943600" y="3108960"/>
-            <a:ext cx="3657600" cy="1828800"/>
-          </a:xfrm>
-          <a:prstGeom prst="rect">
-            <a:avLst/>
-          </a:prstGeom>
-          <a:noFill/>
-          <a:ln/>
-        </p:spPr>
-        <p:txBody>
-          <a:bodyPr wrap="square" rtlCol="0" anchor="ctr"/>
-          <a:lstStyle/>
-          <a:p>
-            <a:pPr indent="0" marL="0">
-              <a:buNone/>
-            </a:pPr>
-            <a:r>
-              <a:rPr lang="en-US" sz="1600" dirty="0">
+            <a:off x="5486400" y="2286000"/>
+            <a:ext cx="3657600" cy="3657600"/>
+          </a:xfrm>
+          <a:prstGeom prst="rect">
+            <a:avLst/>
+          </a:prstGeom>
+          <a:noFill/>
+          <a:ln/>
+        </p:spPr>
+        <p:txBody>
+          <a:bodyPr wrap="square" rtlCol="0" anchor="ctr"/>
+          <a:lstStyle/>
+          <a:p>
+            <a:pPr indent="0" marL="0">
+              <a:buNone/>
+            </a:pPr>
+            <a:r>
+              <a:rPr lang="en-US" sz="1400" dirty="0">
                 <a:solidFill>
                   <a:srgbClr val="000000"/>
                 </a:solidFill>
@@ -7403,7 +6783,7 @@
               <a:buNone/>
             </a:pPr>
             <a:r>
-              <a:rPr lang="en-US" sz="1600" dirty="0">
+              <a:rPr lang="en-US" sz="1400" dirty="0">
                 <a:solidFill>
                   <a:srgbClr val="000000"/>
                 </a:solidFill>
@@ -7415,7 +6795,7 @@
               <a:buNone/>
             </a:pPr>
             <a:r>
-              <a:rPr lang="en-US" sz="1600" dirty="0">
+              <a:rPr lang="en-US" sz="1400" dirty="0">
                 <a:solidFill>
                   <a:srgbClr val="000000"/>
                 </a:solidFill>
@@ -7423,7 +6803,7 @@
               <a:t>• Excel格式
 </a:t>
             </a:r>
-            <a:endParaRPr lang="en-US" sz="1600" dirty="0"/>
+            <a:endParaRPr lang="en-US" sz="1400" dirty="0"/>
           </a:p>
         </p:txBody>
       </p:sp>
@@ -7460,8 +6840,8 @@
         </p:nvSpPr>
         <p:spPr>
           <a:xfrm>
-            <a:off x="0" y="457200"/>
-            <a:ext cx="9144000" cy="914400"/>
+            <a:off x="457200" y="457200"/>
+            <a:ext cx="8229600" cy="914400"/>
           </a:xfrm>
           <a:prstGeom prst="rect">
             <a:avLst/>
@@ -7477,14 +6857,14 @@
               <a:buNone/>
             </a:pPr>
             <a:r>
-              <a:rPr lang="en-US" sz="3200" b="1" dirty="0">
+              <a:rPr lang="en-US" sz="2800" b="1" dirty="0">
                 <a:solidFill>
                   <a:srgbClr val="366092"/>
                 </a:solidFill>
               </a:rPr>
-              <a:t>核心功能</a:t>
-            </a:r>
-            <a:endParaRPr lang="en-US" sz="3200" dirty="0"/>
+              <a:t>核心功能 - 个性化设置</a:t>
+            </a:r>
+            <a:endParaRPr lang="en-US" sz="2800" dirty="0"/>
           </a:p>
         </p:txBody>
       </p:sp>
@@ -7497,43 +6877,7 @@
         <p:spPr>
           <a:xfrm>
             <a:off x="914400" y="1645920"/>
-            <a:ext cx="8229600" cy="731520"/>
-          </a:xfrm>
-          <a:prstGeom prst="rect">
-            <a:avLst/>
-          </a:prstGeom>
-          <a:noFill/>
-          <a:ln/>
-        </p:spPr>
-        <p:txBody>
-          <a:bodyPr wrap="square" rtlCol="0" anchor="ctr"/>
-          <a:lstStyle/>
-          <a:p>
-            <a:pPr indent="0" marL="0">
-              <a:buNone/>
-            </a:pPr>
-            <a:r>
-              <a:rPr lang="en-US" sz="2400" b="1" dirty="0">
-                <a:solidFill>
-                  <a:srgbClr val="548DD4"/>
-                </a:solidFill>
-              </a:rPr>
-              <a:t>5. 个性化设置</a:t>
-            </a:r>
-            <a:endParaRPr lang="en-US" sz="2400" dirty="0"/>
-          </a:p>
-        </p:txBody>
-      </p:sp>
-      <p:sp>
-        <p:nvSpPr>
-          <p:cNvPr id="4" name="Text 2"/>
-          <p:cNvSpPr/>
-          <p:nvPr/>
-        </p:nvSpPr>
-        <p:spPr>
-          <a:xfrm>
-            <a:off x="1371600" y="2560320"/>
-            <a:ext cx="8229600" cy="3657600"/>
+            <a:ext cx="7315200" cy="3657600"/>
           </a:xfrm>
           <a:prstGeom prst="rect">
             <a:avLst/>
